--- a/python-course-ppt/逐节课件/Python讲授课件-单元16.pptx
+++ b/python-course-ppt/逐节课件/Python讲授课件-单元16.pptx
@@ -327,6 +327,80 @@
           </a:p>
         </p:txBody>
       </p:sp>
+      <p:sp>
+        <p:nvSpPr>
+          <p:cNvPr id="2" name="讲课提示"/>
+          <p:cNvSpPr txBox="1"/>
+          <p:nvPr/>
+        </p:nvSpPr>
+        <p:spPr>
+          <a:xfrm>
+            <a:off x="457200" y="457200"/>
+            <a:ext cx="6858000" cy="4800600"/>
+          </a:xfrm>
+          <a:prstGeom prst="rect">
+            <a:avLst/>
+          </a:prstGeom>
+        </p:spPr>
+        <p:txBody>
+          <a:bodyPr wrap="square"/>
+          <a:lstStyle/>
+          <a:p>
+            <a:r>
+              <a:rPr lang="zh-CN" dirty="0"/>
+              <a:t>单元 16 · 单元 16 · 下载真实数据</a:t>
+            </a:r>
+          </a:p>
+          <a:p>
+            <a:r>
+              <a:rPr lang="zh-CN" dirty="0"/>
+              <a:t/>
+            </a:r>
+          </a:p>
+          <a:p>
+            <a:r>
+              <a:rPr lang="zh-CN" dirty="0"/>
+              <a:t>本单元包含以下课节：</a:t>
+            </a:r>
+          </a:p>
+          <a:p>
+            <a:r>
+              <a:rPr lang="zh-CN" dirty="0"/>
+              <a:t>· 第 84 节 CSV 与 datetime</a:t>
+            </a:r>
+          </a:p>
+          <a:p>
+            <a:r>
+              <a:rPr lang="zh-CN" dirty="0"/>
+              <a:t>· 第 85 节 缺失值与温度图</a:t>
+            </a:r>
+          </a:p>
+          <a:p>
+            <a:r>
+              <a:rPr lang="zh-CN" dirty="0"/>
+              <a:t>· 第 86 节 GeoJSON 与地震散点图</a:t>
+            </a:r>
+          </a:p>
+          <a:p>
+            <a:r>
+              <a:rPr lang="zh-CN" dirty="0"/>
+              <a:t>· 第 87 节 实战、答案与验收复盘</a:t>
+            </a:r>
+          </a:p>
+          <a:p>
+            <a:r>
+              <a:rPr lang="zh-CN" dirty="0"/>
+              <a:t/>
+            </a:r>
+          </a:p>
+          <a:p>
+            <a:r>
+              <a:rPr lang="zh-CN" dirty="0"/>
+              <a:t>开场用 3 分钟讲清：这个单元学完能做出什么，最后会被关卡怎么验。</a:t>
+            </a:r>
+          </a:p>
+        </p:txBody>
+      </p:sp>
     </p:spTree>
   </p:cSld>
   <p:clrMapOvr>
@@ -396,6 +470,50 @@
           </a:p>
         </p:txBody>
       </p:sp>
+      <p:sp>
+        <p:nvSpPr>
+          <p:cNvPr id="2" name="讲课提示"/>
+          <p:cNvSpPr txBox="1"/>
+          <p:nvPr/>
+        </p:nvSpPr>
+        <p:spPr>
+          <a:xfrm>
+            <a:off x="457200" y="457200"/>
+            <a:ext cx="6858000" cy="4800600"/>
+          </a:xfrm>
+          <a:prstGeom prst="rect">
+            <a:avLst/>
+          </a:prstGeom>
+        </p:spPr>
+        <p:txBody>
+          <a:bodyPr wrap="square"/>
+          <a:lstStyle/>
+          <a:p>
+            <a:r>
+              <a:rPr lang="zh-CN" dirty="0"/>
+              <a:t>单元 16 小结 · 单元 16 · 小结</a:t>
+            </a:r>
+          </a:p>
+          <a:p>
+            <a:r>
+              <a:rPr lang="zh-CN" dirty="0"/>
+              <a:t/>
+            </a:r>
+          </a:p>
+          <a:p>
+            <a:r>
+              <a:rPr lang="zh-CN" dirty="0"/>
+              <a:t>收尾动作：让学生合上讲义，口述本单元三个最重要的结论；说不出来的，回对应课节。</a:t>
+            </a:r>
+          </a:p>
+          <a:p>
+            <a:r>
+              <a:rPr lang="zh-CN" dirty="0"/>
+              <a:t>然后当场勾一遍本单元课节的「已完成」，没打勾的进下一单元前补掉。</a:t>
+            </a:r>
+          </a:p>
+        </p:txBody>
+      </p:sp>
     </p:spTree>
   </p:cSld>
   <p:clrMapOvr>
@@ -519,6 +637,104 @@
           </a:p>
         </p:txBody>
       </p:sp>
+      <p:sp>
+        <p:nvSpPr>
+          <p:cNvPr id="2" name="讲课提示"/>
+          <p:cNvSpPr txBox="1"/>
+          <p:nvPr/>
+        </p:nvSpPr>
+        <p:spPr>
+          <a:xfrm>
+            <a:off x="457200" y="457200"/>
+            <a:ext cx="6858000" cy="4800600"/>
+          </a:xfrm>
+          <a:prstGeom prst="rect">
+            <a:avLst/>
+          </a:prstGeom>
+        </p:spPr>
+        <p:txBody>
+          <a:bodyPr wrap="square"/>
+          <a:lstStyle/>
+          <a:p>
+            <a:r>
+              <a:rPr lang="zh-CN" dirty="0"/>
+              <a:t>第 84 节 · CSV 与 datetime</a:t>
+            </a:r>
+          </a:p>
+          <a:p>
+            <a:r>
+              <a:rPr lang="zh-CN" dirty="0"/>
+              <a:t>单元 16 · 下载真实数据 · W19–W20</a:t>
+            </a:r>
+          </a:p>
+          <a:p>
+            <a:r>
+              <a:rPr lang="zh-CN" dirty="0"/>
+              <a:t/>
+            </a:r>
+          </a:p>
+          <a:p>
+            <a:r>
+              <a:rPr lang="zh-CN" dirty="0"/>
+              <a:t>学习目标：会用 csv 模块读表头与数据；会用 strptime 把字符串变日期</a:t>
+            </a:r>
+          </a:p>
+          <a:p>
+            <a:r>
+              <a:rPr lang="zh-CN" dirty="0"/>
+              <a:t/>
+            </a:r>
+          </a:p>
+          <a:p>
+            <a:r>
+              <a:rPr lang="zh-CN" dirty="0"/>
+              <a:t>课堂实操（40 分钟，不看答案）：</a:t>
+            </a:r>
+          </a:p>
+          <a:p>
+            <a:r>
+              <a:rPr lang="zh-CN" dirty="0"/>
+              <a:t>· 打印表头及其位置并解释为什么不能硬编码列号</a:t>
+            </a:r>
+          </a:p>
+          <a:p>
+            <a:r>
+              <a:rPr lang="zh-CN" dirty="0"/>
+              <a:t>· 把日期字符串转成 datetime 对象</a:t>
+            </a:r>
+          </a:p>
+          <a:p>
+            <a:r>
+              <a:rPr lang="zh-CN" dirty="0"/>
+              <a:t/>
+            </a:r>
+          </a:p>
+          <a:p>
+            <a:r>
+              <a:rPr lang="zh-CN" dirty="0"/>
+              <a:t>课后作业：</a:t>
+            </a:r>
+          </a:p>
+          <a:p>
+            <a:r>
+              <a:rPr lang="zh-CN" dirty="0"/>
+              <a:t>· 下载教材配套 CSV 数据并跑通第一个例子</a:t>
+            </a:r>
+          </a:p>
+          <a:p>
+            <a:r>
+              <a:rPr lang="zh-CN" dirty="0"/>
+              <a:t/>
+            </a:r>
+          </a:p>
+          <a:p>
+            <a:r>
+              <a:rPr lang="zh-CN" dirty="0"/>
+              <a:t>节奏：讲 20 分钟 → 学员自己敲 40 分钟（不看答案）→ 对讲评自查 20 分钟 → 写作业 10 分钟。</a:t>
+            </a:r>
+          </a:p>
+        </p:txBody>
+      </p:sp>
     </p:spTree>
   </p:cSld>
   <p:clrMapOvr>
@@ -612,6 +828,74 @@
           </a:p>
         </p:txBody>
       </p:sp>
+      <p:sp>
+        <p:nvSpPr>
+          <p:cNvPr id="2" name="讲课提示"/>
+          <p:cNvSpPr txBox="1"/>
+          <p:nvPr/>
+        </p:nvSpPr>
+        <p:spPr>
+          <a:xfrm>
+            <a:off x="457200" y="457200"/>
+            <a:ext cx="6858000" cy="4800600"/>
+          </a:xfrm>
+          <a:prstGeom prst="rect">
+            <a:avLst/>
+          </a:prstGeom>
+        </p:spPr>
+        <p:txBody>
+          <a:bodyPr wrap="square"/>
+          <a:lstStyle/>
+          <a:p>
+            <a:r>
+              <a:rPr lang="zh-CN" dirty="0"/>
+              <a:t>第 84 节 · 核心知识点：CSV 与 datetime</a:t>
+            </a:r>
+          </a:p>
+          <a:p>
+            <a:r>
+              <a:rPr lang="zh-CN" dirty="0"/>
+              <a:t/>
+            </a:r>
+          </a:p>
+          <a:p>
+            <a:r>
+              <a:rPr lang="zh-CN" dirty="0"/>
+              <a:t>讲这一页时：先让学生说出上节课的结论，再逐块讲要点。</a:t>
+            </a:r>
+          </a:p>
+          <a:p>
+            <a:r>
+              <a:rPr lang="zh-CN" dirty="0"/>
+              <a:t>每讲完一块，问一句「这一步如果写错了，报错会长什么样？」——把错误提前讲。</a:t>
+            </a:r>
+          </a:p>
+          <a:p>
+            <a:r>
+              <a:rPr lang="zh-CN" dirty="0"/>
+              <a:t/>
+            </a:r>
+          </a:p>
+          <a:p>
+            <a:r>
+              <a:rPr lang="zh-CN" dirty="0"/>
+              <a:t>本节目标：会用 csv 模块读表头与数据；会用 strptime 把字符串变日期</a:t>
+            </a:r>
+          </a:p>
+          <a:p>
+            <a:r>
+              <a:rPr lang="zh-CN" dirty="0"/>
+              <a:t/>
+            </a:r>
+          </a:p>
+          <a:p>
+            <a:r>
+              <a:rPr lang="zh-CN" dirty="0"/>
+              <a:t>看不到懂的地方，回讲义对应小节读一遍，再回来对着这页复述一次——能讲出来才算真懂。</a:t>
+            </a:r>
+          </a:p>
+        </p:txBody>
+      </p:sp>
     </p:spTree>
   </p:cSld>
   <p:clrMapOvr>
@@ -735,6 +1019,104 @@
           </a:p>
         </p:txBody>
       </p:sp>
+      <p:sp>
+        <p:nvSpPr>
+          <p:cNvPr id="2" name="讲课提示"/>
+          <p:cNvSpPr txBox="1"/>
+          <p:nvPr/>
+        </p:nvSpPr>
+        <p:spPr>
+          <a:xfrm>
+            <a:off x="457200" y="457200"/>
+            <a:ext cx="6858000" cy="4800600"/>
+          </a:xfrm>
+          <a:prstGeom prst="rect">
+            <a:avLst/>
+          </a:prstGeom>
+        </p:spPr>
+        <p:txBody>
+          <a:bodyPr wrap="square"/>
+          <a:lstStyle/>
+          <a:p>
+            <a:r>
+              <a:rPr lang="zh-CN" dirty="0"/>
+              <a:t>第 85 节 · 缺失值与温度图</a:t>
+            </a:r>
+          </a:p>
+          <a:p>
+            <a:r>
+              <a:rPr lang="zh-CN" dirty="0"/>
+              <a:t>单元 16 · 下载真实数据 · W20</a:t>
+            </a:r>
+          </a:p>
+          <a:p>
+            <a:r>
+              <a:rPr lang="zh-CN" dirty="0"/>
+              <a:t/>
+            </a:r>
+          </a:p>
+          <a:p>
+            <a:r>
+              <a:rPr lang="zh-CN" dirty="0"/>
+              <a:t>学习目标：知道真实数据的三个坑；会用 try/except 处理缺失值</a:t>
+            </a:r>
+          </a:p>
+          <a:p>
+            <a:r>
+              <a:rPr lang="zh-CN" dirty="0"/>
+              <a:t/>
+            </a:r>
+          </a:p>
+          <a:p>
+            <a:r>
+              <a:rPr lang="zh-CN" dirty="0"/>
+              <a:t>课堂实操（40 分钟，不看答案）：</a:t>
+            </a:r>
+          </a:p>
+          <a:p>
+            <a:r>
+              <a:rPr lang="zh-CN" dirty="0"/>
+              <a:t>· 把缺失那行去掉，看图变形</a:t>
+            </a:r>
+          </a:p>
+          <a:p>
+            <a:r>
+              <a:rPr lang="zh-CN" dirty="0"/>
+              <a:t>· 用 fill_between 画出温度区间带</a:t>
+            </a:r>
+          </a:p>
+          <a:p>
+            <a:r>
+              <a:rPr lang="zh-CN" dirty="0"/>
+              <a:t/>
+            </a:r>
+          </a:p>
+          <a:p>
+            <a:r>
+              <a:rPr lang="zh-CN" dirty="0"/>
+              <a:t>课后作业：</a:t>
+            </a:r>
+          </a:p>
+          <a:p>
+            <a:r>
+              <a:rPr lang="zh-CN" dirty="0"/>
+              <a:t>· ★ 完成练习：给自己的城市画一个月气温图</a:t>
+            </a:r>
+          </a:p>
+          <a:p>
+            <a:r>
+              <a:rPr lang="zh-CN" dirty="0"/>
+              <a:t/>
+            </a:r>
+          </a:p>
+          <a:p>
+            <a:r>
+              <a:rPr lang="zh-CN" dirty="0"/>
+              <a:t>节奏：讲 20 分钟 → 学员自己敲 40 分钟（不看答案）→ 对讲评自查 20 分钟 → 写作业 10 分钟。</a:t>
+            </a:r>
+          </a:p>
+        </p:txBody>
+      </p:sp>
     </p:spTree>
   </p:cSld>
   <p:clrMapOvr>
@@ -828,6 +1210,74 @@
           </a:p>
         </p:txBody>
       </p:sp>
+      <p:sp>
+        <p:nvSpPr>
+          <p:cNvPr id="2" name="讲课提示"/>
+          <p:cNvSpPr txBox="1"/>
+          <p:nvPr/>
+        </p:nvSpPr>
+        <p:spPr>
+          <a:xfrm>
+            <a:off x="457200" y="457200"/>
+            <a:ext cx="6858000" cy="4800600"/>
+          </a:xfrm>
+          <a:prstGeom prst="rect">
+            <a:avLst/>
+          </a:prstGeom>
+        </p:spPr>
+        <p:txBody>
+          <a:bodyPr wrap="square"/>
+          <a:lstStyle/>
+          <a:p>
+            <a:r>
+              <a:rPr lang="zh-CN" dirty="0"/>
+              <a:t>第 85 节 · 核心知识点：缺失值与温度图</a:t>
+            </a:r>
+          </a:p>
+          <a:p>
+            <a:r>
+              <a:rPr lang="zh-CN" dirty="0"/>
+              <a:t/>
+            </a:r>
+          </a:p>
+          <a:p>
+            <a:r>
+              <a:rPr lang="zh-CN" dirty="0"/>
+              <a:t>讲这一页时：先让学生说出上节课的结论，再逐块讲要点。</a:t>
+            </a:r>
+          </a:p>
+          <a:p>
+            <a:r>
+              <a:rPr lang="zh-CN" dirty="0"/>
+              <a:t>每讲完一块，问一句「这一步如果写错了，报错会长什么样？」——把错误提前讲。</a:t>
+            </a:r>
+          </a:p>
+          <a:p>
+            <a:r>
+              <a:rPr lang="zh-CN" dirty="0"/>
+              <a:t/>
+            </a:r>
+          </a:p>
+          <a:p>
+            <a:r>
+              <a:rPr lang="zh-CN" dirty="0"/>
+              <a:t>本节目标：知道真实数据的三个坑；会用 try/except 处理缺失值</a:t>
+            </a:r>
+          </a:p>
+          <a:p>
+            <a:r>
+              <a:rPr lang="zh-CN" dirty="0"/>
+              <a:t/>
+            </a:r>
+          </a:p>
+          <a:p>
+            <a:r>
+              <a:rPr lang="zh-CN" dirty="0"/>
+              <a:t>看不到懂的地方，回讲义对应小节读一遍，再回来对着这页复述一次——能讲出来才算真懂。</a:t>
+            </a:r>
+          </a:p>
+        </p:txBody>
+      </p:sp>
     </p:spTree>
   </p:cSld>
   <p:clrMapOvr>
@@ -951,6 +1401,104 @@
           </a:p>
         </p:txBody>
       </p:sp>
+      <p:sp>
+        <p:nvSpPr>
+          <p:cNvPr id="2" name="讲课提示"/>
+          <p:cNvSpPr txBox="1"/>
+          <p:nvPr/>
+        </p:nvSpPr>
+        <p:spPr>
+          <a:xfrm>
+            <a:off x="457200" y="457200"/>
+            <a:ext cx="6858000" cy="4800600"/>
+          </a:xfrm>
+          <a:prstGeom prst="rect">
+            <a:avLst/>
+          </a:prstGeom>
+        </p:spPr>
+        <p:txBody>
+          <a:bodyPr wrap="square"/>
+          <a:lstStyle/>
+          <a:p>
+            <a:r>
+              <a:rPr lang="zh-CN" dirty="0"/>
+              <a:t>第 86 节 · GeoJSON 与地震散点图</a:t>
+            </a:r>
+          </a:p>
+          <a:p>
+            <a:r>
+              <a:rPr lang="zh-CN" dirty="0"/>
+              <a:t>单元 16 · 下载真实数据 · W20</a:t>
+            </a:r>
+          </a:p>
+          <a:p>
+            <a:r>
+              <a:rPr lang="zh-CN" dirty="0"/>
+              <a:t/>
+            </a:r>
+          </a:p>
+          <a:p>
+            <a:r>
+              <a:rPr lang="zh-CN" dirty="0"/>
+              <a:t>学习目标：读懂 GeoJSON 结构；用 scatter_geo 画全球散点图</a:t>
+            </a:r>
+          </a:p>
+          <a:p>
+            <a:r>
+              <a:rPr lang="zh-CN" dirty="0"/>
+              <a:t/>
+            </a:r>
+          </a:p>
+          <a:p>
+            <a:r>
+              <a:rPr lang="zh-CN" dirty="0"/>
+              <a:t>课堂实操（40 分钟，不看答案）：</a:t>
+            </a:r>
+          </a:p>
+          <a:p>
+            <a:r>
+              <a:rPr lang="zh-CN" dirty="0"/>
+              <a:t>· 打印第一条地震的 mag 与 coordinates</a:t>
+            </a:r>
+          </a:p>
+          <a:p>
+            <a:r>
+              <a:rPr lang="zh-CN" dirty="0"/>
+              <a:t>· 故意把经纬度顺序写反，看图错在哪</a:t>
+            </a:r>
+          </a:p>
+          <a:p>
+            <a:r>
+              <a:rPr lang="zh-CN" dirty="0"/>
+              <a:t/>
+            </a:r>
+          </a:p>
+          <a:p>
+            <a:r>
+              <a:rPr lang="zh-CN" dirty="0"/>
+              <a:t>课后作业：</a:t>
+            </a:r>
+          </a:p>
+          <a:p>
+            <a:r>
+              <a:rPr lang="zh-CN" dirty="0"/>
+              <a:t>· 去 USGS 下载最新一天数据重画</a:t>
+            </a:r>
+          </a:p>
+          <a:p>
+            <a:r>
+              <a:rPr lang="zh-CN" dirty="0"/>
+              <a:t/>
+            </a:r>
+          </a:p>
+          <a:p>
+            <a:r>
+              <a:rPr lang="zh-CN" dirty="0"/>
+              <a:t>节奏：讲 20 分钟 → 学员自己敲 40 分钟（不看答案）→ 对讲评自查 20 分钟 → 写作业 10 分钟。</a:t>
+            </a:r>
+          </a:p>
+        </p:txBody>
+      </p:sp>
     </p:spTree>
   </p:cSld>
   <p:clrMapOvr>
@@ -1044,6 +1592,74 @@
           </a:p>
         </p:txBody>
       </p:sp>
+      <p:sp>
+        <p:nvSpPr>
+          <p:cNvPr id="2" name="讲课提示"/>
+          <p:cNvSpPr txBox="1"/>
+          <p:nvPr/>
+        </p:nvSpPr>
+        <p:spPr>
+          <a:xfrm>
+            <a:off x="457200" y="457200"/>
+            <a:ext cx="6858000" cy="4800600"/>
+          </a:xfrm>
+          <a:prstGeom prst="rect">
+            <a:avLst/>
+          </a:prstGeom>
+        </p:spPr>
+        <p:txBody>
+          <a:bodyPr wrap="square"/>
+          <a:lstStyle/>
+          <a:p>
+            <a:r>
+              <a:rPr lang="zh-CN" dirty="0"/>
+              <a:t>第 86 节 · 核心知识点：GeoJSON 与地震散点图</a:t>
+            </a:r>
+          </a:p>
+          <a:p>
+            <a:r>
+              <a:rPr lang="zh-CN" dirty="0"/>
+              <a:t/>
+            </a:r>
+          </a:p>
+          <a:p>
+            <a:r>
+              <a:rPr lang="zh-CN" dirty="0"/>
+              <a:t>讲这一页时：先让学生说出上节课的结论，再逐块讲要点。</a:t>
+            </a:r>
+          </a:p>
+          <a:p>
+            <a:r>
+              <a:rPr lang="zh-CN" dirty="0"/>
+              <a:t>每讲完一块，问一句「这一步如果写错了，报错会长什么样？」——把错误提前讲。</a:t>
+            </a:r>
+          </a:p>
+          <a:p>
+            <a:r>
+              <a:rPr lang="zh-CN" dirty="0"/>
+              <a:t/>
+            </a:r>
+          </a:p>
+          <a:p>
+            <a:r>
+              <a:rPr lang="zh-CN" dirty="0"/>
+              <a:t>本节目标：读懂 GeoJSON 结构；用 scatter_geo 画全球散点图</a:t>
+            </a:r>
+          </a:p>
+          <a:p>
+            <a:r>
+              <a:rPr lang="zh-CN" dirty="0"/>
+              <a:t/>
+            </a:r>
+          </a:p>
+          <a:p>
+            <a:r>
+              <a:rPr lang="zh-CN" dirty="0"/>
+              <a:t>看不到懂的地方，回讲义对应小节读一遍，再回来对着这页复述一次——能讲出来才算真懂。</a:t>
+            </a:r>
+          </a:p>
+        </p:txBody>
+      </p:sp>
     </p:spTree>
   </p:cSld>
   <p:clrMapOvr>
@@ -1167,6 +1783,104 @@
           </a:p>
         </p:txBody>
       </p:sp>
+      <p:sp>
+        <p:nvSpPr>
+          <p:cNvPr id="2" name="讲课提示"/>
+          <p:cNvSpPr txBox="1"/>
+          <p:nvPr/>
+        </p:nvSpPr>
+        <p:spPr>
+          <a:xfrm>
+            <a:off x="457200" y="457200"/>
+            <a:ext cx="6858000" cy="4800600"/>
+          </a:xfrm>
+          <a:prstGeom prst="rect">
+            <a:avLst/>
+          </a:prstGeom>
+        </p:spPr>
+        <p:txBody>
+          <a:bodyPr wrap="square"/>
+          <a:lstStyle/>
+          <a:p>
+            <a:r>
+              <a:rPr lang="zh-CN" dirty="0"/>
+              <a:t>第 87 节 · 实战、答案与验收复盘</a:t>
+            </a:r>
+          </a:p>
+          <a:p>
+            <a:r>
+              <a:rPr lang="zh-CN" dirty="0"/>
+              <a:t>单元 16 · 下载真实数据 · W20–W21</a:t>
+            </a:r>
+          </a:p>
+          <a:p>
+            <a:r>
+              <a:rPr lang="zh-CN" dirty="0"/>
+              <a:t/>
+            </a:r>
+          </a:p>
+          <a:p>
+            <a:r>
+              <a:rPr lang="zh-CN" dirty="0"/>
+              <a:t>学习目标：独立完成单元 16 练习，处理真实脏数据</a:t>
+            </a:r>
+          </a:p>
+          <a:p>
+            <a:r>
+              <a:rPr lang="zh-CN" dirty="0"/>
+              <a:t/>
+            </a:r>
+          </a:p>
+          <a:p>
+            <a:r>
+              <a:rPr lang="zh-CN" dirty="0"/>
+              <a:t>课堂实操（40 分钟，不看答案）：</a:t>
+            </a:r>
+          </a:p>
+          <a:p>
+            <a:r>
+              <a:rPr lang="zh-CN" dirty="0"/>
+              <a:t>· 限时 30 分钟独立完成基础档</a:t>
+            </a:r>
+          </a:p>
+          <a:p>
+            <a:r>
+              <a:rPr lang="zh-CN" dirty="0"/>
+              <a:t>· 逐题对照答案讲评</a:t>
+            </a:r>
+          </a:p>
+          <a:p>
+            <a:r>
+              <a:rPr lang="zh-CN" dirty="0"/>
+              <a:t/>
+            </a:r>
+          </a:p>
+          <a:p>
+            <a:r>
+              <a:rPr lang="zh-CN" dirty="0"/>
+              <a:t>课后作业：</a:t>
+            </a:r>
+          </a:p>
+          <a:p>
+            <a:r>
+              <a:rPr lang="zh-CN" dirty="0"/>
+              <a:t>· ★ 产出：气温图 + 全球地震散点图</a:t>
+            </a:r>
+          </a:p>
+          <a:p>
+            <a:r>
+              <a:rPr lang="zh-CN" dirty="0"/>
+              <a:t/>
+            </a:r>
+          </a:p>
+          <a:p>
+            <a:r>
+              <a:rPr lang="zh-CN" dirty="0"/>
+              <a:t>节奏：讲 20 分钟 → 学员自己敲 40 分钟（不看答案）→ 对讲评自查 20 分钟 → 写作业 10 分钟。</a:t>
+            </a:r>
+          </a:p>
+        </p:txBody>
+      </p:sp>
     </p:spTree>
   </p:cSld>
   <p:clrMapOvr>
@@ -1192,6 +1906,74 @@
           <a:chExt cx="0" cy="0"/>
         </a:xfrm>
       </p:grpSpPr>
+      <p:sp>
+        <p:nvSpPr>
+          <p:cNvPr id="2" name="讲课提示"/>
+          <p:cNvSpPr txBox="1"/>
+          <p:nvPr/>
+        </p:nvSpPr>
+        <p:spPr>
+          <a:xfrm>
+            <a:off x="457200" y="457200"/>
+            <a:ext cx="6858000" cy="4800600"/>
+          </a:xfrm>
+          <a:prstGeom prst="rect">
+            <a:avLst/>
+          </a:prstGeom>
+        </p:spPr>
+        <p:txBody>
+          <a:bodyPr wrap="square"/>
+          <a:lstStyle/>
+          <a:p>
+            <a:r>
+              <a:rPr lang="zh-CN" dirty="0"/>
+              <a:t>第 87 节 · 核心知识点：实战、答案与验收复盘</a:t>
+            </a:r>
+          </a:p>
+          <a:p>
+            <a:r>
+              <a:rPr lang="zh-CN" dirty="0"/>
+              <a:t/>
+            </a:r>
+          </a:p>
+          <a:p>
+            <a:r>
+              <a:rPr lang="zh-CN" dirty="0"/>
+              <a:t>讲这一页时：先让学生说出上节课的结论，再逐块讲要点。</a:t>
+            </a:r>
+          </a:p>
+          <a:p>
+            <a:r>
+              <a:rPr lang="zh-CN" dirty="0"/>
+              <a:t>每讲完一块，问一句「这一步如果写错了，报错会长什么样？」——把错误提前讲。</a:t>
+            </a:r>
+          </a:p>
+          <a:p>
+            <a:r>
+              <a:rPr lang="zh-CN" dirty="0"/>
+              <a:t/>
+            </a:r>
+          </a:p>
+          <a:p>
+            <a:r>
+              <a:rPr lang="zh-CN" dirty="0"/>
+              <a:t>本节目标：独立完成单元 16 练习，处理真实脏数据</a:t>
+            </a:r>
+          </a:p>
+          <a:p>
+            <a:r>
+              <a:rPr lang="zh-CN" dirty="0"/>
+              <a:t/>
+            </a:r>
+          </a:p>
+          <a:p>
+            <a:r>
+              <a:rPr lang="zh-CN" dirty="0"/>
+              <a:t>看不到懂的地方，回讲义对应小节读一遍，再回来对着这页复述一次——能讲出来才算真懂。</a:t>
+            </a:r>
+          </a:p>
+        </p:txBody>
+      </p:sp>
       <p:sp>
         <p:nvSpPr>
           <p:cNvPr id="2" name="讲课提示"/>

--- a/python-course-ppt/逐节课件/Python讲授课件-单元16.pptx
+++ b/python-course-ppt/逐节课件/Python讲授课件-单元16.pptx
@@ -236,1820 +236,6 @@
 </p:notesMaster>
 </file>
 
-<file path=ppt/notesSlides/notesSlide1.xml><?xml version="1.0" encoding="utf-8"?>
-<p:notes xmlns:a="http://schemas.openxmlformats.org/drawingml/2006/main" xmlns:p="http://schemas.openxmlformats.org/presentationml/2006/main" xmlns:r="http://schemas.openxmlformats.org/officeDocument/2006/relationships">
-  <p:cSld>
-    <p:spTree>
-      <p:nvGrpSpPr>
-        <p:cNvPr id="1" name=""/>
-        <p:cNvGrpSpPr/>
-        <p:nvPr/>
-      </p:nvGrpSpPr>
-      <p:grpSpPr>
-        <a:xfrm>
-          <a:off x="0" y="0"/>
-          <a:ext cx="0" cy="0"/>
-          <a:chOff x="0" y="0"/>
-          <a:chExt cx="0" cy="0"/>
-        </a:xfrm>
-      </p:grpSpPr>
-      <p:sp>
-        <p:nvSpPr>
-          <p:cNvPr id="2" name="讲课提示"/>
-          <p:cNvSpPr txBox="1"/>
-          <p:nvPr/>
-        </p:nvSpPr>
-        <p:spPr>
-          <a:xfrm>
-            <a:off x="457200" y="457200"/>
-            <a:ext cx="6858000" cy="4800600"/>
-          </a:xfrm>
-          <a:prstGeom prst="rect">
-            <a:avLst/>
-          </a:prstGeom>
-        </p:spPr>
-        <p:txBody>
-          <a:bodyPr wrap="square"/>
-          <a:lstStyle/>
-          <a:p>
-            <a:r>
-              <a:rPr lang="zh-CN" dirty="0"/>
-              <a:t>单元 16 · 单元 16 · 下载真实数据</a:t>
-            </a:r>
-          </a:p>
-          <a:p>
-            <a:r>
-              <a:rPr lang="zh-CN" dirty="0"/>
-              <a:t/>
-            </a:r>
-          </a:p>
-          <a:p>
-            <a:r>
-              <a:rPr lang="zh-CN" dirty="0"/>
-              <a:t>本单元包含以下课节：</a:t>
-            </a:r>
-          </a:p>
-          <a:p>
-            <a:r>
-              <a:rPr lang="zh-CN" dirty="0"/>
-              <a:t>· 第 84 节 CSV 与 datetime</a:t>
-            </a:r>
-          </a:p>
-          <a:p>
-            <a:r>
-              <a:rPr lang="zh-CN" dirty="0"/>
-              <a:t>· 第 85 节 缺失值与温度图</a:t>
-            </a:r>
-          </a:p>
-          <a:p>
-            <a:r>
-              <a:rPr lang="zh-CN" dirty="0"/>
-              <a:t>· 第 86 节 GeoJSON 与地震散点图</a:t>
-            </a:r>
-          </a:p>
-          <a:p>
-            <a:r>
-              <a:rPr lang="zh-CN" dirty="0"/>
-              <a:t>· 第 87 节 实战、答案与验收复盘</a:t>
-            </a:r>
-          </a:p>
-          <a:p>
-            <a:r>
-              <a:rPr lang="zh-CN" dirty="0"/>
-              <a:t/>
-            </a:r>
-          </a:p>
-          <a:p>
-            <a:r>
-              <a:rPr lang="zh-CN" dirty="0"/>
-              <a:t>开场用 3 分钟讲清：这个单元学完能做出什么，最后会被关卡怎么验。</a:t>
-            </a:r>
-          </a:p>
-        </p:txBody>
-      </p:sp>
-      <p:sp>
-        <p:nvSpPr>
-          <p:cNvPr id="2" name="讲课提示"/>
-          <p:cNvSpPr txBox="1"/>
-          <p:nvPr/>
-        </p:nvSpPr>
-        <p:spPr>
-          <a:xfrm>
-            <a:off x="457200" y="457200"/>
-            <a:ext cx="6858000" cy="4800600"/>
-          </a:xfrm>
-          <a:prstGeom prst="rect">
-            <a:avLst/>
-          </a:prstGeom>
-        </p:spPr>
-        <p:txBody>
-          <a:bodyPr wrap="square"/>
-          <a:lstStyle/>
-          <a:p>
-            <a:r>
-              <a:rPr lang="zh-CN" dirty="0"/>
-              <a:t>单元 16 · 单元 16 · 下载真实数据</a:t>
-            </a:r>
-          </a:p>
-          <a:p>
-            <a:r>
-              <a:rPr lang="zh-CN" dirty="0"/>
-              <a:t/>
-            </a:r>
-          </a:p>
-          <a:p>
-            <a:r>
-              <a:rPr lang="zh-CN" dirty="0"/>
-              <a:t>本单元包含以下课节：</a:t>
-            </a:r>
-          </a:p>
-          <a:p>
-            <a:r>
-              <a:rPr lang="zh-CN" dirty="0"/>
-              <a:t>· 第 84 节 CSV 与 datetime</a:t>
-            </a:r>
-          </a:p>
-          <a:p>
-            <a:r>
-              <a:rPr lang="zh-CN" dirty="0"/>
-              <a:t>· 第 85 节 缺失值与温度图</a:t>
-            </a:r>
-          </a:p>
-          <a:p>
-            <a:r>
-              <a:rPr lang="zh-CN" dirty="0"/>
-              <a:t>· 第 86 节 GeoJSON 与地震散点图</a:t>
-            </a:r>
-          </a:p>
-          <a:p>
-            <a:r>
-              <a:rPr lang="zh-CN" dirty="0"/>
-              <a:t>· 第 87 节 实战、答案与验收复盘</a:t>
-            </a:r>
-          </a:p>
-          <a:p>
-            <a:r>
-              <a:rPr lang="zh-CN" dirty="0"/>
-              <a:t/>
-            </a:r>
-          </a:p>
-          <a:p>
-            <a:r>
-              <a:rPr lang="zh-CN" dirty="0"/>
-              <a:t>开场用 3 分钟讲清：这个单元学完能做出什么，最后会被关卡怎么验。</a:t>
-            </a:r>
-          </a:p>
-        </p:txBody>
-      </p:sp>
-    </p:spTree>
-  </p:cSld>
-  <p:clrMapOvr>
-    <a:masterClrMapping/>
-  </p:clrMapOvr>
-</p:notes>
-</file>
-
-<file path=ppt/notesSlides/notesSlide10.xml><?xml version="1.0" encoding="utf-8"?>
-<p:notes xmlns:a="http://schemas.openxmlformats.org/drawingml/2006/main" xmlns:p="http://schemas.openxmlformats.org/presentationml/2006/main" xmlns:r="http://schemas.openxmlformats.org/officeDocument/2006/relationships">
-  <p:cSld>
-    <p:spTree>
-      <p:nvGrpSpPr>
-        <p:cNvPr id="1" name=""/>
-        <p:cNvGrpSpPr/>
-        <p:nvPr/>
-      </p:nvGrpSpPr>
-      <p:grpSpPr>
-        <a:xfrm>
-          <a:off x="0" y="0"/>
-          <a:ext cx="0" cy="0"/>
-          <a:chOff x="0" y="0"/>
-          <a:chExt cx="0" cy="0"/>
-        </a:xfrm>
-      </p:grpSpPr>
-      <p:sp>
-        <p:nvSpPr>
-          <p:cNvPr id="2" name="讲课提示"/>
-          <p:cNvSpPr txBox="1"/>
-          <p:nvPr/>
-        </p:nvSpPr>
-        <p:spPr>
-          <a:xfrm>
-            <a:off x="457200" y="457200"/>
-            <a:ext cx="6858000" cy="4800600"/>
-          </a:xfrm>
-          <a:prstGeom prst="rect">
-            <a:avLst/>
-          </a:prstGeom>
-        </p:spPr>
-        <p:txBody>
-          <a:bodyPr wrap="square"/>
-          <a:lstStyle/>
-          <a:p>
-            <a:r>
-              <a:rPr lang="zh-CN" dirty="0"/>
-              <a:t>单元 16 小结 · 单元 16 · 小结</a:t>
-            </a:r>
-          </a:p>
-          <a:p>
-            <a:r>
-              <a:rPr lang="zh-CN" dirty="0"/>
-              <a:t/>
-            </a:r>
-          </a:p>
-          <a:p>
-            <a:r>
-              <a:rPr lang="zh-CN" dirty="0"/>
-              <a:t>收尾动作：让学生合上讲义，口述本单元三个最重要的结论；说不出来的，回对应课节。</a:t>
-            </a:r>
-          </a:p>
-          <a:p>
-            <a:r>
-              <a:rPr lang="zh-CN" dirty="0"/>
-              <a:t>然后当场勾一遍本单元课节的「已完成」，没打勾的进下一单元前补掉。</a:t>
-            </a:r>
-          </a:p>
-        </p:txBody>
-      </p:sp>
-      <p:sp>
-        <p:nvSpPr>
-          <p:cNvPr id="2" name="讲课提示"/>
-          <p:cNvSpPr txBox="1"/>
-          <p:nvPr/>
-        </p:nvSpPr>
-        <p:spPr>
-          <a:xfrm>
-            <a:off x="457200" y="457200"/>
-            <a:ext cx="6858000" cy="4800600"/>
-          </a:xfrm>
-          <a:prstGeom prst="rect">
-            <a:avLst/>
-          </a:prstGeom>
-        </p:spPr>
-        <p:txBody>
-          <a:bodyPr wrap="square"/>
-          <a:lstStyle/>
-          <a:p>
-            <a:r>
-              <a:rPr lang="zh-CN" dirty="0"/>
-              <a:t>单元 16 小结 · 单元 16 · 小结</a:t>
-            </a:r>
-          </a:p>
-          <a:p>
-            <a:r>
-              <a:rPr lang="zh-CN" dirty="0"/>
-              <a:t/>
-            </a:r>
-          </a:p>
-          <a:p>
-            <a:r>
-              <a:rPr lang="zh-CN" dirty="0"/>
-              <a:t>收尾动作：让学生合上讲义，口述本单元三个最重要的结论；说不出来的，回对应课节。</a:t>
-            </a:r>
-          </a:p>
-          <a:p>
-            <a:r>
-              <a:rPr lang="zh-CN" dirty="0"/>
-              <a:t>然后当场勾一遍本单元课节的「已完成」，没打勾的进下一单元前补掉。</a:t>
-            </a:r>
-          </a:p>
-        </p:txBody>
-      </p:sp>
-    </p:spTree>
-  </p:cSld>
-  <p:clrMapOvr>
-    <a:masterClrMapping/>
-  </p:clrMapOvr>
-</p:notes>
-</file>
-
-<file path=ppt/notesSlides/notesSlide2.xml><?xml version="1.0" encoding="utf-8"?>
-<p:notes xmlns:a="http://schemas.openxmlformats.org/drawingml/2006/main" xmlns:p="http://schemas.openxmlformats.org/presentationml/2006/main" xmlns:r="http://schemas.openxmlformats.org/officeDocument/2006/relationships">
-  <p:cSld>
-    <p:spTree>
-      <p:nvGrpSpPr>
-        <p:cNvPr id="1" name=""/>
-        <p:cNvGrpSpPr/>
-        <p:nvPr/>
-      </p:nvGrpSpPr>
-      <p:grpSpPr>
-        <a:xfrm>
-          <a:off x="0" y="0"/>
-          <a:ext cx="0" cy="0"/>
-          <a:chOff x="0" y="0"/>
-          <a:chExt cx="0" cy="0"/>
-        </a:xfrm>
-      </p:grpSpPr>
-      <p:sp>
-        <p:nvSpPr>
-          <p:cNvPr id="2" name="讲课提示"/>
-          <p:cNvSpPr txBox="1"/>
-          <p:nvPr/>
-        </p:nvSpPr>
-        <p:spPr>
-          <a:xfrm>
-            <a:off x="457200" y="457200"/>
-            <a:ext cx="6858000" cy="4800600"/>
-          </a:xfrm>
-          <a:prstGeom prst="rect">
-            <a:avLst/>
-          </a:prstGeom>
-        </p:spPr>
-        <p:txBody>
-          <a:bodyPr wrap="square"/>
-          <a:lstStyle/>
-          <a:p>
-            <a:r>
-              <a:rPr lang="zh-CN" dirty="0"/>
-              <a:t>第 84 节 · CSV 与 datetime</a:t>
-            </a:r>
-          </a:p>
-          <a:p>
-            <a:r>
-              <a:rPr lang="zh-CN" dirty="0"/>
-              <a:t>单元 16 · 下载真实数据 · W19–W20</a:t>
-            </a:r>
-          </a:p>
-          <a:p>
-            <a:r>
-              <a:rPr lang="zh-CN" dirty="0"/>
-              <a:t/>
-            </a:r>
-          </a:p>
-          <a:p>
-            <a:r>
-              <a:rPr lang="zh-CN" dirty="0"/>
-              <a:t>学习目标：会用 csv 模块读表头与数据；会用 strptime 把字符串变日期</a:t>
-            </a:r>
-          </a:p>
-          <a:p>
-            <a:r>
-              <a:rPr lang="zh-CN" dirty="0"/>
-              <a:t/>
-            </a:r>
-          </a:p>
-          <a:p>
-            <a:r>
-              <a:rPr lang="zh-CN" dirty="0"/>
-              <a:t>课堂实操（40 分钟，不看答案）：</a:t>
-            </a:r>
-          </a:p>
-          <a:p>
-            <a:r>
-              <a:rPr lang="zh-CN" dirty="0"/>
-              <a:t>· 打印表头及其位置并解释为什么不能硬编码列号</a:t>
-            </a:r>
-          </a:p>
-          <a:p>
-            <a:r>
-              <a:rPr lang="zh-CN" dirty="0"/>
-              <a:t>· 把日期字符串转成 datetime 对象</a:t>
-            </a:r>
-          </a:p>
-          <a:p>
-            <a:r>
-              <a:rPr lang="zh-CN" dirty="0"/>
-              <a:t/>
-            </a:r>
-          </a:p>
-          <a:p>
-            <a:r>
-              <a:rPr lang="zh-CN" dirty="0"/>
-              <a:t>课后作业：</a:t>
-            </a:r>
-          </a:p>
-          <a:p>
-            <a:r>
-              <a:rPr lang="zh-CN" dirty="0"/>
-              <a:t>· 下载教材配套 CSV 数据并跑通第一个例子</a:t>
-            </a:r>
-          </a:p>
-          <a:p>
-            <a:r>
-              <a:rPr lang="zh-CN" dirty="0"/>
-              <a:t/>
-            </a:r>
-          </a:p>
-          <a:p>
-            <a:r>
-              <a:rPr lang="zh-CN" dirty="0"/>
-              <a:t>节奏：讲 20 分钟 → 学员自己敲 40 分钟（不看答案）→ 对讲评自查 20 分钟 → 写作业 10 分钟。</a:t>
-            </a:r>
-          </a:p>
-        </p:txBody>
-      </p:sp>
-      <p:sp>
-        <p:nvSpPr>
-          <p:cNvPr id="2" name="讲课提示"/>
-          <p:cNvSpPr txBox="1"/>
-          <p:nvPr/>
-        </p:nvSpPr>
-        <p:spPr>
-          <a:xfrm>
-            <a:off x="457200" y="457200"/>
-            <a:ext cx="6858000" cy="4800600"/>
-          </a:xfrm>
-          <a:prstGeom prst="rect">
-            <a:avLst/>
-          </a:prstGeom>
-        </p:spPr>
-        <p:txBody>
-          <a:bodyPr wrap="square"/>
-          <a:lstStyle/>
-          <a:p>
-            <a:r>
-              <a:rPr lang="zh-CN" dirty="0"/>
-              <a:t>第 84 节 · CSV 与 datetime</a:t>
-            </a:r>
-          </a:p>
-          <a:p>
-            <a:r>
-              <a:rPr lang="zh-CN" dirty="0"/>
-              <a:t>单元 16 · 下载真实数据 · W19–W20</a:t>
-            </a:r>
-          </a:p>
-          <a:p>
-            <a:r>
-              <a:rPr lang="zh-CN" dirty="0"/>
-              <a:t/>
-            </a:r>
-          </a:p>
-          <a:p>
-            <a:r>
-              <a:rPr lang="zh-CN" dirty="0"/>
-              <a:t>学习目标：会用 csv 模块读表头与数据；会用 strptime 把字符串变日期</a:t>
-            </a:r>
-          </a:p>
-          <a:p>
-            <a:r>
-              <a:rPr lang="zh-CN" dirty="0"/>
-              <a:t/>
-            </a:r>
-          </a:p>
-          <a:p>
-            <a:r>
-              <a:rPr lang="zh-CN" dirty="0"/>
-              <a:t>课堂实操（40 分钟，不看答案）：</a:t>
-            </a:r>
-          </a:p>
-          <a:p>
-            <a:r>
-              <a:rPr lang="zh-CN" dirty="0"/>
-              <a:t>· 打印表头及其位置并解释为什么不能硬编码列号</a:t>
-            </a:r>
-          </a:p>
-          <a:p>
-            <a:r>
-              <a:rPr lang="zh-CN" dirty="0"/>
-              <a:t>· 把日期字符串转成 datetime 对象</a:t>
-            </a:r>
-          </a:p>
-          <a:p>
-            <a:r>
-              <a:rPr lang="zh-CN" dirty="0"/>
-              <a:t/>
-            </a:r>
-          </a:p>
-          <a:p>
-            <a:r>
-              <a:rPr lang="zh-CN" dirty="0"/>
-              <a:t>课后作业：</a:t>
-            </a:r>
-          </a:p>
-          <a:p>
-            <a:r>
-              <a:rPr lang="zh-CN" dirty="0"/>
-              <a:t>· 下载教材配套 CSV 数据并跑通第一个例子</a:t>
-            </a:r>
-          </a:p>
-          <a:p>
-            <a:r>
-              <a:rPr lang="zh-CN" dirty="0"/>
-              <a:t/>
-            </a:r>
-          </a:p>
-          <a:p>
-            <a:r>
-              <a:rPr lang="zh-CN" dirty="0"/>
-              <a:t>节奏：讲 20 分钟 → 学员自己敲 40 分钟（不看答案）→ 对讲评自查 20 分钟 → 写作业 10 分钟。</a:t>
-            </a:r>
-          </a:p>
-        </p:txBody>
-      </p:sp>
-    </p:spTree>
-  </p:cSld>
-  <p:clrMapOvr>
-    <a:masterClrMapping/>
-  </p:clrMapOvr>
-</p:notes>
-</file>
-
-<file path=ppt/notesSlides/notesSlide3.xml><?xml version="1.0" encoding="utf-8"?>
-<p:notes xmlns:a="http://schemas.openxmlformats.org/drawingml/2006/main" xmlns:p="http://schemas.openxmlformats.org/presentationml/2006/main" xmlns:r="http://schemas.openxmlformats.org/officeDocument/2006/relationships">
-  <p:cSld>
-    <p:spTree>
-      <p:nvGrpSpPr>
-        <p:cNvPr id="1" name=""/>
-        <p:cNvGrpSpPr/>
-        <p:nvPr/>
-      </p:nvGrpSpPr>
-      <p:grpSpPr>
-        <a:xfrm>
-          <a:off x="0" y="0"/>
-          <a:ext cx="0" cy="0"/>
-          <a:chOff x="0" y="0"/>
-          <a:chExt cx="0" cy="0"/>
-        </a:xfrm>
-      </p:grpSpPr>
-      <p:sp>
-        <p:nvSpPr>
-          <p:cNvPr id="2" name="讲课提示"/>
-          <p:cNvSpPr txBox="1"/>
-          <p:nvPr/>
-        </p:nvSpPr>
-        <p:spPr>
-          <a:xfrm>
-            <a:off x="457200" y="457200"/>
-            <a:ext cx="6858000" cy="4800600"/>
-          </a:xfrm>
-          <a:prstGeom prst="rect">
-            <a:avLst/>
-          </a:prstGeom>
-        </p:spPr>
-        <p:txBody>
-          <a:bodyPr wrap="square"/>
-          <a:lstStyle/>
-          <a:p>
-            <a:r>
-              <a:rPr lang="zh-CN" dirty="0"/>
-              <a:t>第 84 节 · 核心知识点：CSV 与 datetime</a:t>
-            </a:r>
-          </a:p>
-          <a:p>
-            <a:r>
-              <a:rPr lang="zh-CN" dirty="0"/>
-              <a:t/>
-            </a:r>
-          </a:p>
-          <a:p>
-            <a:r>
-              <a:rPr lang="zh-CN" dirty="0"/>
-              <a:t>讲这一页时：先让学生说出上节课的结论，再逐块讲要点。</a:t>
-            </a:r>
-          </a:p>
-          <a:p>
-            <a:r>
-              <a:rPr lang="zh-CN" dirty="0"/>
-              <a:t>每讲完一块，问一句「这一步如果写错了，报错会长什么样？」——把错误提前讲。</a:t>
-            </a:r>
-          </a:p>
-          <a:p>
-            <a:r>
-              <a:rPr lang="zh-CN" dirty="0"/>
-              <a:t/>
-            </a:r>
-          </a:p>
-          <a:p>
-            <a:r>
-              <a:rPr lang="zh-CN" dirty="0"/>
-              <a:t>本节目标：会用 csv 模块读表头与数据；会用 strptime 把字符串变日期</a:t>
-            </a:r>
-          </a:p>
-          <a:p>
-            <a:r>
-              <a:rPr lang="zh-CN" dirty="0"/>
-              <a:t/>
-            </a:r>
-          </a:p>
-          <a:p>
-            <a:r>
-              <a:rPr lang="zh-CN" dirty="0"/>
-              <a:t>看不到懂的地方，回讲义对应小节读一遍，再回来对着这页复述一次——能讲出来才算真懂。</a:t>
-            </a:r>
-          </a:p>
-        </p:txBody>
-      </p:sp>
-      <p:sp>
-        <p:nvSpPr>
-          <p:cNvPr id="2" name="讲课提示"/>
-          <p:cNvSpPr txBox="1"/>
-          <p:nvPr/>
-        </p:nvSpPr>
-        <p:spPr>
-          <a:xfrm>
-            <a:off x="457200" y="457200"/>
-            <a:ext cx="6858000" cy="4800600"/>
-          </a:xfrm>
-          <a:prstGeom prst="rect">
-            <a:avLst/>
-          </a:prstGeom>
-        </p:spPr>
-        <p:txBody>
-          <a:bodyPr wrap="square"/>
-          <a:lstStyle/>
-          <a:p>
-            <a:r>
-              <a:rPr lang="zh-CN" dirty="0"/>
-              <a:t>第 84 节 · 核心知识点：CSV 与 datetime</a:t>
-            </a:r>
-          </a:p>
-          <a:p>
-            <a:r>
-              <a:rPr lang="zh-CN" dirty="0"/>
-              <a:t/>
-            </a:r>
-          </a:p>
-          <a:p>
-            <a:r>
-              <a:rPr lang="zh-CN" dirty="0"/>
-              <a:t>讲这一页时：先让学生说出上节课的结论，再逐块讲要点。</a:t>
-            </a:r>
-          </a:p>
-          <a:p>
-            <a:r>
-              <a:rPr lang="zh-CN" dirty="0"/>
-              <a:t>每讲完一块，问一句「这一步如果写错了，报错会长什么样？」——把错误提前讲。</a:t>
-            </a:r>
-          </a:p>
-          <a:p>
-            <a:r>
-              <a:rPr lang="zh-CN" dirty="0"/>
-              <a:t/>
-            </a:r>
-          </a:p>
-          <a:p>
-            <a:r>
-              <a:rPr lang="zh-CN" dirty="0"/>
-              <a:t>本节目标：会用 csv 模块读表头与数据；会用 strptime 把字符串变日期</a:t>
-            </a:r>
-          </a:p>
-          <a:p>
-            <a:r>
-              <a:rPr lang="zh-CN" dirty="0"/>
-              <a:t/>
-            </a:r>
-          </a:p>
-          <a:p>
-            <a:r>
-              <a:rPr lang="zh-CN" dirty="0"/>
-              <a:t>看不到懂的地方，回讲义对应小节读一遍，再回来对着这页复述一次——能讲出来才算真懂。</a:t>
-            </a:r>
-          </a:p>
-        </p:txBody>
-      </p:sp>
-    </p:spTree>
-  </p:cSld>
-  <p:clrMapOvr>
-    <a:masterClrMapping/>
-  </p:clrMapOvr>
-</p:notes>
-</file>
-
-<file path=ppt/notesSlides/notesSlide4.xml><?xml version="1.0" encoding="utf-8"?>
-<p:notes xmlns:a="http://schemas.openxmlformats.org/drawingml/2006/main" xmlns:p="http://schemas.openxmlformats.org/presentationml/2006/main" xmlns:r="http://schemas.openxmlformats.org/officeDocument/2006/relationships">
-  <p:cSld>
-    <p:spTree>
-      <p:nvGrpSpPr>
-        <p:cNvPr id="1" name=""/>
-        <p:cNvGrpSpPr/>
-        <p:nvPr/>
-      </p:nvGrpSpPr>
-      <p:grpSpPr>
-        <a:xfrm>
-          <a:off x="0" y="0"/>
-          <a:ext cx="0" cy="0"/>
-          <a:chOff x="0" y="0"/>
-          <a:chExt cx="0" cy="0"/>
-        </a:xfrm>
-      </p:grpSpPr>
-      <p:sp>
-        <p:nvSpPr>
-          <p:cNvPr id="2" name="讲课提示"/>
-          <p:cNvSpPr txBox="1"/>
-          <p:nvPr/>
-        </p:nvSpPr>
-        <p:spPr>
-          <a:xfrm>
-            <a:off x="457200" y="457200"/>
-            <a:ext cx="6858000" cy="4800600"/>
-          </a:xfrm>
-          <a:prstGeom prst="rect">
-            <a:avLst/>
-          </a:prstGeom>
-        </p:spPr>
-        <p:txBody>
-          <a:bodyPr wrap="square"/>
-          <a:lstStyle/>
-          <a:p>
-            <a:r>
-              <a:rPr lang="zh-CN" dirty="0"/>
-              <a:t>第 85 节 · 缺失值与温度图</a:t>
-            </a:r>
-          </a:p>
-          <a:p>
-            <a:r>
-              <a:rPr lang="zh-CN" dirty="0"/>
-              <a:t>单元 16 · 下载真实数据 · W20</a:t>
-            </a:r>
-          </a:p>
-          <a:p>
-            <a:r>
-              <a:rPr lang="zh-CN" dirty="0"/>
-              <a:t/>
-            </a:r>
-          </a:p>
-          <a:p>
-            <a:r>
-              <a:rPr lang="zh-CN" dirty="0"/>
-              <a:t>学习目标：知道真实数据的三个坑；会用 try/except 处理缺失值</a:t>
-            </a:r>
-          </a:p>
-          <a:p>
-            <a:r>
-              <a:rPr lang="zh-CN" dirty="0"/>
-              <a:t/>
-            </a:r>
-          </a:p>
-          <a:p>
-            <a:r>
-              <a:rPr lang="zh-CN" dirty="0"/>
-              <a:t>课堂实操（40 分钟，不看答案）：</a:t>
-            </a:r>
-          </a:p>
-          <a:p>
-            <a:r>
-              <a:rPr lang="zh-CN" dirty="0"/>
-              <a:t>· 把缺失那行去掉，看图变形</a:t>
-            </a:r>
-          </a:p>
-          <a:p>
-            <a:r>
-              <a:rPr lang="zh-CN" dirty="0"/>
-              <a:t>· 用 fill_between 画出温度区间带</a:t>
-            </a:r>
-          </a:p>
-          <a:p>
-            <a:r>
-              <a:rPr lang="zh-CN" dirty="0"/>
-              <a:t/>
-            </a:r>
-          </a:p>
-          <a:p>
-            <a:r>
-              <a:rPr lang="zh-CN" dirty="0"/>
-              <a:t>课后作业：</a:t>
-            </a:r>
-          </a:p>
-          <a:p>
-            <a:r>
-              <a:rPr lang="zh-CN" dirty="0"/>
-              <a:t>· ★ 完成练习：给自己的城市画一个月气温图</a:t>
-            </a:r>
-          </a:p>
-          <a:p>
-            <a:r>
-              <a:rPr lang="zh-CN" dirty="0"/>
-              <a:t/>
-            </a:r>
-          </a:p>
-          <a:p>
-            <a:r>
-              <a:rPr lang="zh-CN" dirty="0"/>
-              <a:t>节奏：讲 20 分钟 → 学员自己敲 40 分钟（不看答案）→ 对讲评自查 20 分钟 → 写作业 10 分钟。</a:t>
-            </a:r>
-          </a:p>
-        </p:txBody>
-      </p:sp>
-      <p:sp>
-        <p:nvSpPr>
-          <p:cNvPr id="2" name="讲课提示"/>
-          <p:cNvSpPr txBox="1"/>
-          <p:nvPr/>
-        </p:nvSpPr>
-        <p:spPr>
-          <a:xfrm>
-            <a:off x="457200" y="457200"/>
-            <a:ext cx="6858000" cy="4800600"/>
-          </a:xfrm>
-          <a:prstGeom prst="rect">
-            <a:avLst/>
-          </a:prstGeom>
-        </p:spPr>
-        <p:txBody>
-          <a:bodyPr wrap="square"/>
-          <a:lstStyle/>
-          <a:p>
-            <a:r>
-              <a:rPr lang="zh-CN" dirty="0"/>
-              <a:t>第 85 节 · 缺失值与温度图</a:t>
-            </a:r>
-          </a:p>
-          <a:p>
-            <a:r>
-              <a:rPr lang="zh-CN" dirty="0"/>
-              <a:t>单元 16 · 下载真实数据 · W20</a:t>
-            </a:r>
-          </a:p>
-          <a:p>
-            <a:r>
-              <a:rPr lang="zh-CN" dirty="0"/>
-              <a:t/>
-            </a:r>
-          </a:p>
-          <a:p>
-            <a:r>
-              <a:rPr lang="zh-CN" dirty="0"/>
-              <a:t>学习目标：知道真实数据的三个坑；会用 try/except 处理缺失值</a:t>
-            </a:r>
-          </a:p>
-          <a:p>
-            <a:r>
-              <a:rPr lang="zh-CN" dirty="0"/>
-              <a:t/>
-            </a:r>
-          </a:p>
-          <a:p>
-            <a:r>
-              <a:rPr lang="zh-CN" dirty="0"/>
-              <a:t>课堂实操（40 分钟，不看答案）：</a:t>
-            </a:r>
-          </a:p>
-          <a:p>
-            <a:r>
-              <a:rPr lang="zh-CN" dirty="0"/>
-              <a:t>· 把缺失那行去掉，看图变形</a:t>
-            </a:r>
-          </a:p>
-          <a:p>
-            <a:r>
-              <a:rPr lang="zh-CN" dirty="0"/>
-              <a:t>· 用 fill_between 画出温度区间带</a:t>
-            </a:r>
-          </a:p>
-          <a:p>
-            <a:r>
-              <a:rPr lang="zh-CN" dirty="0"/>
-              <a:t/>
-            </a:r>
-          </a:p>
-          <a:p>
-            <a:r>
-              <a:rPr lang="zh-CN" dirty="0"/>
-              <a:t>课后作业：</a:t>
-            </a:r>
-          </a:p>
-          <a:p>
-            <a:r>
-              <a:rPr lang="zh-CN" dirty="0"/>
-              <a:t>· ★ 完成练习：给自己的城市画一个月气温图</a:t>
-            </a:r>
-          </a:p>
-          <a:p>
-            <a:r>
-              <a:rPr lang="zh-CN" dirty="0"/>
-              <a:t/>
-            </a:r>
-          </a:p>
-          <a:p>
-            <a:r>
-              <a:rPr lang="zh-CN" dirty="0"/>
-              <a:t>节奏：讲 20 分钟 → 学员自己敲 40 分钟（不看答案）→ 对讲评自查 20 分钟 → 写作业 10 分钟。</a:t>
-            </a:r>
-          </a:p>
-        </p:txBody>
-      </p:sp>
-    </p:spTree>
-  </p:cSld>
-  <p:clrMapOvr>
-    <a:masterClrMapping/>
-  </p:clrMapOvr>
-</p:notes>
-</file>
-
-<file path=ppt/notesSlides/notesSlide5.xml><?xml version="1.0" encoding="utf-8"?>
-<p:notes xmlns:a="http://schemas.openxmlformats.org/drawingml/2006/main" xmlns:p="http://schemas.openxmlformats.org/presentationml/2006/main" xmlns:r="http://schemas.openxmlformats.org/officeDocument/2006/relationships">
-  <p:cSld>
-    <p:spTree>
-      <p:nvGrpSpPr>
-        <p:cNvPr id="1" name=""/>
-        <p:cNvGrpSpPr/>
-        <p:nvPr/>
-      </p:nvGrpSpPr>
-      <p:grpSpPr>
-        <a:xfrm>
-          <a:off x="0" y="0"/>
-          <a:ext cx="0" cy="0"/>
-          <a:chOff x="0" y="0"/>
-          <a:chExt cx="0" cy="0"/>
-        </a:xfrm>
-      </p:grpSpPr>
-      <p:sp>
-        <p:nvSpPr>
-          <p:cNvPr id="2" name="讲课提示"/>
-          <p:cNvSpPr txBox="1"/>
-          <p:nvPr/>
-        </p:nvSpPr>
-        <p:spPr>
-          <a:xfrm>
-            <a:off x="457200" y="457200"/>
-            <a:ext cx="6858000" cy="4800600"/>
-          </a:xfrm>
-          <a:prstGeom prst="rect">
-            <a:avLst/>
-          </a:prstGeom>
-        </p:spPr>
-        <p:txBody>
-          <a:bodyPr wrap="square"/>
-          <a:lstStyle/>
-          <a:p>
-            <a:r>
-              <a:rPr lang="zh-CN" dirty="0"/>
-              <a:t>第 85 节 · 核心知识点：缺失值与温度图</a:t>
-            </a:r>
-          </a:p>
-          <a:p>
-            <a:r>
-              <a:rPr lang="zh-CN" dirty="0"/>
-              <a:t/>
-            </a:r>
-          </a:p>
-          <a:p>
-            <a:r>
-              <a:rPr lang="zh-CN" dirty="0"/>
-              <a:t>讲这一页时：先让学生说出上节课的结论，再逐块讲要点。</a:t>
-            </a:r>
-          </a:p>
-          <a:p>
-            <a:r>
-              <a:rPr lang="zh-CN" dirty="0"/>
-              <a:t>每讲完一块，问一句「这一步如果写错了，报错会长什么样？」——把错误提前讲。</a:t>
-            </a:r>
-          </a:p>
-          <a:p>
-            <a:r>
-              <a:rPr lang="zh-CN" dirty="0"/>
-              <a:t/>
-            </a:r>
-          </a:p>
-          <a:p>
-            <a:r>
-              <a:rPr lang="zh-CN" dirty="0"/>
-              <a:t>本节目标：知道真实数据的三个坑；会用 try/except 处理缺失值</a:t>
-            </a:r>
-          </a:p>
-          <a:p>
-            <a:r>
-              <a:rPr lang="zh-CN" dirty="0"/>
-              <a:t/>
-            </a:r>
-          </a:p>
-          <a:p>
-            <a:r>
-              <a:rPr lang="zh-CN" dirty="0"/>
-              <a:t>看不到懂的地方，回讲义对应小节读一遍，再回来对着这页复述一次——能讲出来才算真懂。</a:t>
-            </a:r>
-          </a:p>
-        </p:txBody>
-      </p:sp>
-      <p:sp>
-        <p:nvSpPr>
-          <p:cNvPr id="2" name="讲课提示"/>
-          <p:cNvSpPr txBox="1"/>
-          <p:nvPr/>
-        </p:nvSpPr>
-        <p:spPr>
-          <a:xfrm>
-            <a:off x="457200" y="457200"/>
-            <a:ext cx="6858000" cy="4800600"/>
-          </a:xfrm>
-          <a:prstGeom prst="rect">
-            <a:avLst/>
-          </a:prstGeom>
-        </p:spPr>
-        <p:txBody>
-          <a:bodyPr wrap="square"/>
-          <a:lstStyle/>
-          <a:p>
-            <a:r>
-              <a:rPr lang="zh-CN" dirty="0"/>
-              <a:t>第 85 节 · 核心知识点：缺失值与温度图</a:t>
-            </a:r>
-          </a:p>
-          <a:p>
-            <a:r>
-              <a:rPr lang="zh-CN" dirty="0"/>
-              <a:t/>
-            </a:r>
-          </a:p>
-          <a:p>
-            <a:r>
-              <a:rPr lang="zh-CN" dirty="0"/>
-              <a:t>讲这一页时：先让学生说出上节课的结论，再逐块讲要点。</a:t>
-            </a:r>
-          </a:p>
-          <a:p>
-            <a:r>
-              <a:rPr lang="zh-CN" dirty="0"/>
-              <a:t>每讲完一块，问一句「这一步如果写错了，报错会长什么样？」——把错误提前讲。</a:t>
-            </a:r>
-          </a:p>
-          <a:p>
-            <a:r>
-              <a:rPr lang="zh-CN" dirty="0"/>
-              <a:t/>
-            </a:r>
-          </a:p>
-          <a:p>
-            <a:r>
-              <a:rPr lang="zh-CN" dirty="0"/>
-              <a:t>本节目标：知道真实数据的三个坑；会用 try/except 处理缺失值</a:t>
-            </a:r>
-          </a:p>
-          <a:p>
-            <a:r>
-              <a:rPr lang="zh-CN" dirty="0"/>
-              <a:t/>
-            </a:r>
-          </a:p>
-          <a:p>
-            <a:r>
-              <a:rPr lang="zh-CN" dirty="0"/>
-              <a:t>看不到懂的地方，回讲义对应小节读一遍，再回来对着这页复述一次——能讲出来才算真懂。</a:t>
-            </a:r>
-          </a:p>
-        </p:txBody>
-      </p:sp>
-    </p:spTree>
-  </p:cSld>
-  <p:clrMapOvr>
-    <a:masterClrMapping/>
-  </p:clrMapOvr>
-</p:notes>
-</file>
-
-<file path=ppt/notesSlides/notesSlide6.xml><?xml version="1.0" encoding="utf-8"?>
-<p:notes xmlns:a="http://schemas.openxmlformats.org/drawingml/2006/main" xmlns:p="http://schemas.openxmlformats.org/presentationml/2006/main" xmlns:r="http://schemas.openxmlformats.org/officeDocument/2006/relationships">
-  <p:cSld>
-    <p:spTree>
-      <p:nvGrpSpPr>
-        <p:cNvPr id="1" name=""/>
-        <p:cNvGrpSpPr/>
-        <p:nvPr/>
-      </p:nvGrpSpPr>
-      <p:grpSpPr>
-        <a:xfrm>
-          <a:off x="0" y="0"/>
-          <a:ext cx="0" cy="0"/>
-          <a:chOff x="0" y="0"/>
-          <a:chExt cx="0" cy="0"/>
-        </a:xfrm>
-      </p:grpSpPr>
-      <p:sp>
-        <p:nvSpPr>
-          <p:cNvPr id="2" name="讲课提示"/>
-          <p:cNvSpPr txBox="1"/>
-          <p:nvPr/>
-        </p:nvSpPr>
-        <p:spPr>
-          <a:xfrm>
-            <a:off x="457200" y="457200"/>
-            <a:ext cx="6858000" cy="4800600"/>
-          </a:xfrm>
-          <a:prstGeom prst="rect">
-            <a:avLst/>
-          </a:prstGeom>
-        </p:spPr>
-        <p:txBody>
-          <a:bodyPr wrap="square"/>
-          <a:lstStyle/>
-          <a:p>
-            <a:r>
-              <a:rPr lang="zh-CN" dirty="0"/>
-              <a:t>第 86 节 · GeoJSON 与地震散点图</a:t>
-            </a:r>
-          </a:p>
-          <a:p>
-            <a:r>
-              <a:rPr lang="zh-CN" dirty="0"/>
-              <a:t>单元 16 · 下载真实数据 · W20</a:t>
-            </a:r>
-          </a:p>
-          <a:p>
-            <a:r>
-              <a:rPr lang="zh-CN" dirty="0"/>
-              <a:t/>
-            </a:r>
-          </a:p>
-          <a:p>
-            <a:r>
-              <a:rPr lang="zh-CN" dirty="0"/>
-              <a:t>学习目标：读懂 GeoJSON 结构；用 scatter_geo 画全球散点图</a:t>
-            </a:r>
-          </a:p>
-          <a:p>
-            <a:r>
-              <a:rPr lang="zh-CN" dirty="0"/>
-              <a:t/>
-            </a:r>
-          </a:p>
-          <a:p>
-            <a:r>
-              <a:rPr lang="zh-CN" dirty="0"/>
-              <a:t>课堂实操（40 分钟，不看答案）：</a:t>
-            </a:r>
-          </a:p>
-          <a:p>
-            <a:r>
-              <a:rPr lang="zh-CN" dirty="0"/>
-              <a:t>· 打印第一条地震的 mag 与 coordinates</a:t>
-            </a:r>
-          </a:p>
-          <a:p>
-            <a:r>
-              <a:rPr lang="zh-CN" dirty="0"/>
-              <a:t>· 故意把经纬度顺序写反，看图错在哪</a:t>
-            </a:r>
-          </a:p>
-          <a:p>
-            <a:r>
-              <a:rPr lang="zh-CN" dirty="0"/>
-              <a:t/>
-            </a:r>
-          </a:p>
-          <a:p>
-            <a:r>
-              <a:rPr lang="zh-CN" dirty="0"/>
-              <a:t>课后作业：</a:t>
-            </a:r>
-          </a:p>
-          <a:p>
-            <a:r>
-              <a:rPr lang="zh-CN" dirty="0"/>
-              <a:t>· 去 USGS 下载最新一天数据重画</a:t>
-            </a:r>
-          </a:p>
-          <a:p>
-            <a:r>
-              <a:rPr lang="zh-CN" dirty="0"/>
-              <a:t/>
-            </a:r>
-          </a:p>
-          <a:p>
-            <a:r>
-              <a:rPr lang="zh-CN" dirty="0"/>
-              <a:t>节奏：讲 20 分钟 → 学员自己敲 40 分钟（不看答案）→ 对讲评自查 20 分钟 → 写作业 10 分钟。</a:t>
-            </a:r>
-          </a:p>
-        </p:txBody>
-      </p:sp>
-      <p:sp>
-        <p:nvSpPr>
-          <p:cNvPr id="2" name="讲课提示"/>
-          <p:cNvSpPr txBox="1"/>
-          <p:nvPr/>
-        </p:nvSpPr>
-        <p:spPr>
-          <a:xfrm>
-            <a:off x="457200" y="457200"/>
-            <a:ext cx="6858000" cy="4800600"/>
-          </a:xfrm>
-          <a:prstGeom prst="rect">
-            <a:avLst/>
-          </a:prstGeom>
-        </p:spPr>
-        <p:txBody>
-          <a:bodyPr wrap="square"/>
-          <a:lstStyle/>
-          <a:p>
-            <a:r>
-              <a:rPr lang="zh-CN" dirty="0"/>
-              <a:t>第 86 节 · GeoJSON 与地震散点图</a:t>
-            </a:r>
-          </a:p>
-          <a:p>
-            <a:r>
-              <a:rPr lang="zh-CN" dirty="0"/>
-              <a:t>单元 16 · 下载真实数据 · W20</a:t>
-            </a:r>
-          </a:p>
-          <a:p>
-            <a:r>
-              <a:rPr lang="zh-CN" dirty="0"/>
-              <a:t/>
-            </a:r>
-          </a:p>
-          <a:p>
-            <a:r>
-              <a:rPr lang="zh-CN" dirty="0"/>
-              <a:t>学习目标：读懂 GeoJSON 结构；用 scatter_geo 画全球散点图</a:t>
-            </a:r>
-          </a:p>
-          <a:p>
-            <a:r>
-              <a:rPr lang="zh-CN" dirty="0"/>
-              <a:t/>
-            </a:r>
-          </a:p>
-          <a:p>
-            <a:r>
-              <a:rPr lang="zh-CN" dirty="0"/>
-              <a:t>课堂实操（40 分钟，不看答案）：</a:t>
-            </a:r>
-          </a:p>
-          <a:p>
-            <a:r>
-              <a:rPr lang="zh-CN" dirty="0"/>
-              <a:t>· 打印第一条地震的 mag 与 coordinates</a:t>
-            </a:r>
-          </a:p>
-          <a:p>
-            <a:r>
-              <a:rPr lang="zh-CN" dirty="0"/>
-              <a:t>· 故意把经纬度顺序写反，看图错在哪</a:t>
-            </a:r>
-          </a:p>
-          <a:p>
-            <a:r>
-              <a:rPr lang="zh-CN" dirty="0"/>
-              <a:t/>
-            </a:r>
-          </a:p>
-          <a:p>
-            <a:r>
-              <a:rPr lang="zh-CN" dirty="0"/>
-              <a:t>课后作业：</a:t>
-            </a:r>
-          </a:p>
-          <a:p>
-            <a:r>
-              <a:rPr lang="zh-CN" dirty="0"/>
-              <a:t>· 去 USGS 下载最新一天数据重画</a:t>
-            </a:r>
-          </a:p>
-          <a:p>
-            <a:r>
-              <a:rPr lang="zh-CN" dirty="0"/>
-              <a:t/>
-            </a:r>
-          </a:p>
-          <a:p>
-            <a:r>
-              <a:rPr lang="zh-CN" dirty="0"/>
-              <a:t>节奏：讲 20 分钟 → 学员自己敲 40 分钟（不看答案）→ 对讲评自查 20 分钟 → 写作业 10 分钟。</a:t>
-            </a:r>
-          </a:p>
-        </p:txBody>
-      </p:sp>
-    </p:spTree>
-  </p:cSld>
-  <p:clrMapOvr>
-    <a:masterClrMapping/>
-  </p:clrMapOvr>
-</p:notes>
-</file>
-
-<file path=ppt/notesSlides/notesSlide7.xml><?xml version="1.0" encoding="utf-8"?>
-<p:notes xmlns:a="http://schemas.openxmlformats.org/drawingml/2006/main" xmlns:p="http://schemas.openxmlformats.org/presentationml/2006/main" xmlns:r="http://schemas.openxmlformats.org/officeDocument/2006/relationships">
-  <p:cSld>
-    <p:spTree>
-      <p:nvGrpSpPr>
-        <p:cNvPr id="1" name=""/>
-        <p:cNvGrpSpPr/>
-        <p:nvPr/>
-      </p:nvGrpSpPr>
-      <p:grpSpPr>
-        <a:xfrm>
-          <a:off x="0" y="0"/>
-          <a:ext cx="0" cy="0"/>
-          <a:chOff x="0" y="0"/>
-          <a:chExt cx="0" cy="0"/>
-        </a:xfrm>
-      </p:grpSpPr>
-      <p:sp>
-        <p:nvSpPr>
-          <p:cNvPr id="2" name="讲课提示"/>
-          <p:cNvSpPr txBox="1"/>
-          <p:nvPr/>
-        </p:nvSpPr>
-        <p:spPr>
-          <a:xfrm>
-            <a:off x="457200" y="457200"/>
-            <a:ext cx="6858000" cy="4800600"/>
-          </a:xfrm>
-          <a:prstGeom prst="rect">
-            <a:avLst/>
-          </a:prstGeom>
-        </p:spPr>
-        <p:txBody>
-          <a:bodyPr wrap="square"/>
-          <a:lstStyle/>
-          <a:p>
-            <a:r>
-              <a:rPr lang="zh-CN" dirty="0"/>
-              <a:t>第 86 节 · 核心知识点：GeoJSON 与地震散点图</a:t>
-            </a:r>
-          </a:p>
-          <a:p>
-            <a:r>
-              <a:rPr lang="zh-CN" dirty="0"/>
-              <a:t/>
-            </a:r>
-          </a:p>
-          <a:p>
-            <a:r>
-              <a:rPr lang="zh-CN" dirty="0"/>
-              <a:t>讲这一页时：先让学生说出上节课的结论，再逐块讲要点。</a:t>
-            </a:r>
-          </a:p>
-          <a:p>
-            <a:r>
-              <a:rPr lang="zh-CN" dirty="0"/>
-              <a:t>每讲完一块，问一句「这一步如果写错了，报错会长什么样？」——把错误提前讲。</a:t>
-            </a:r>
-          </a:p>
-          <a:p>
-            <a:r>
-              <a:rPr lang="zh-CN" dirty="0"/>
-              <a:t/>
-            </a:r>
-          </a:p>
-          <a:p>
-            <a:r>
-              <a:rPr lang="zh-CN" dirty="0"/>
-              <a:t>本节目标：读懂 GeoJSON 结构；用 scatter_geo 画全球散点图</a:t>
-            </a:r>
-          </a:p>
-          <a:p>
-            <a:r>
-              <a:rPr lang="zh-CN" dirty="0"/>
-              <a:t/>
-            </a:r>
-          </a:p>
-          <a:p>
-            <a:r>
-              <a:rPr lang="zh-CN" dirty="0"/>
-              <a:t>看不到懂的地方，回讲义对应小节读一遍，再回来对着这页复述一次——能讲出来才算真懂。</a:t>
-            </a:r>
-          </a:p>
-        </p:txBody>
-      </p:sp>
-      <p:sp>
-        <p:nvSpPr>
-          <p:cNvPr id="2" name="讲课提示"/>
-          <p:cNvSpPr txBox="1"/>
-          <p:nvPr/>
-        </p:nvSpPr>
-        <p:spPr>
-          <a:xfrm>
-            <a:off x="457200" y="457200"/>
-            <a:ext cx="6858000" cy="4800600"/>
-          </a:xfrm>
-          <a:prstGeom prst="rect">
-            <a:avLst/>
-          </a:prstGeom>
-        </p:spPr>
-        <p:txBody>
-          <a:bodyPr wrap="square"/>
-          <a:lstStyle/>
-          <a:p>
-            <a:r>
-              <a:rPr lang="zh-CN" dirty="0"/>
-              <a:t>第 86 节 · 核心知识点：GeoJSON 与地震散点图</a:t>
-            </a:r>
-          </a:p>
-          <a:p>
-            <a:r>
-              <a:rPr lang="zh-CN" dirty="0"/>
-              <a:t/>
-            </a:r>
-          </a:p>
-          <a:p>
-            <a:r>
-              <a:rPr lang="zh-CN" dirty="0"/>
-              <a:t>讲这一页时：先让学生说出上节课的结论，再逐块讲要点。</a:t>
-            </a:r>
-          </a:p>
-          <a:p>
-            <a:r>
-              <a:rPr lang="zh-CN" dirty="0"/>
-              <a:t>每讲完一块，问一句「这一步如果写错了，报错会长什么样？」——把错误提前讲。</a:t>
-            </a:r>
-          </a:p>
-          <a:p>
-            <a:r>
-              <a:rPr lang="zh-CN" dirty="0"/>
-              <a:t/>
-            </a:r>
-          </a:p>
-          <a:p>
-            <a:r>
-              <a:rPr lang="zh-CN" dirty="0"/>
-              <a:t>本节目标：读懂 GeoJSON 结构；用 scatter_geo 画全球散点图</a:t>
-            </a:r>
-          </a:p>
-          <a:p>
-            <a:r>
-              <a:rPr lang="zh-CN" dirty="0"/>
-              <a:t/>
-            </a:r>
-          </a:p>
-          <a:p>
-            <a:r>
-              <a:rPr lang="zh-CN" dirty="0"/>
-              <a:t>看不到懂的地方，回讲义对应小节读一遍，再回来对着这页复述一次——能讲出来才算真懂。</a:t>
-            </a:r>
-          </a:p>
-        </p:txBody>
-      </p:sp>
-    </p:spTree>
-  </p:cSld>
-  <p:clrMapOvr>
-    <a:masterClrMapping/>
-  </p:clrMapOvr>
-</p:notes>
-</file>
-
-<file path=ppt/notesSlides/notesSlide8.xml><?xml version="1.0" encoding="utf-8"?>
-<p:notes xmlns:a="http://schemas.openxmlformats.org/drawingml/2006/main" xmlns:p="http://schemas.openxmlformats.org/presentationml/2006/main" xmlns:r="http://schemas.openxmlformats.org/officeDocument/2006/relationships">
-  <p:cSld>
-    <p:spTree>
-      <p:nvGrpSpPr>
-        <p:cNvPr id="1" name=""/>
-        <p:cNvGrpSpPr/>
-        <p:nvPr/>
-      </p:nvGrpSpPr>
-      <p:grpSpPr>
-        <a:xfrm>
-          <a:off x="0" y="0"/>
-          <a:ext cx="0" cy="0"/>
-          <a:chOff x="0" y="0"/>
-          <a:chExt cx="0" cy="0"/>
-        </a:xfrm>
-      </p:grpSpPr>
-      <p:sp>
-        <p:nvSpPr>
-          <p:cNvPr id="2" name="讲课提示"/>
-          <p:cNvSpPr txBox="1"/>
-          <p:nvPr/>
-        </p:nvSpPr>
-        <p:spPr>
-          <a:xfrm>
-            <a:off x="457200" y="457200"/>
-            <a:ext cx="6858000" cy="4800600"/>
-          </a:xfrm>
-          <a:prstGeom prst="rect">
-            <a:avLst/>
-          </a:prstGeom>
-        </p:spPr>
-        <p:txBody>
-          <a:bodyPr wrap="square"/>
-          <a:lstStyle/>
-          <a:p>
-            <a:r>
-              <a:rPr lang="zh-CN" dirty="0"/>
-              <a:t>第 87 节 · 实战、答案与验收复盘</a:t>
-            </a:r>
-          </a:p>
-          <a:p>
-            <a:r>
-              <a:rPr lang="zh-CN" dirty="0"/>
-              <a:t>单元 16 · 下载真实数据 · W20–W21</a:t>
-            </a:r>
-          </a:p>
-          <a:p>
-            <a:r>
-              <a:rPr lang="zh-CN" dirty="0"/>
-              <a:t/>
-            </a:r>
-          </a:p>
-          <a:p>
-            <a:r>
-              <a:rPr lang="zh-CN" dirty="0"/>
-              <a:t>学习目标：独立完成单元 16 练习，处理真实脏数据</a:t>
-            </a:r>
-          </a:p>
-          <a:p>
-            <a:r>
-              <a:rPr lang="zh-CN" dirty="0"/>
-              <a:t/>
-            </a:r>
-          </a:p>
-          <a:p>
-            <a:r>
-              <a:rPr lang="zh-CN" dirty="0"/>
-              <a:t>课堂实操（40 分钟，不看答案）：</a:t>
-            </a:r>
-          </a:p>
-          <a:p>
-            <a:r>
-              <a:rPr lang="zh-CN" dirty="0"/>
-              <a:t>· 限时 30 分钟独立完成基础档</a:t>
-            </a:r>
-          </a:p>
-          <a:p>
-            <a:r>
-              <a:rPr lang="zh-CN" dirty="0"/>
-              <a:t>· 逐题对照答案讲评</a:t>
-            </a:r>
-          </a:p>
-          <a:p>
-            <a:r>
-              <a:rPr lang="zh-CN" dirty="0"/>
-              <a:t/>
-            </a:r>
-          </a:p>
-          <a:p>
-            <a:r>
-              <a:rPr lang="zh-CN" dirty="0"/>
-              <a:t>课后作业：</a:t>
-            </a:r>
-          </a:p>
-          <a:p>
-            <a:r>
-              <a:rPr lang="zh-CN" dirty="0"/>
-              <a:t>· ★ 产出：气温图 + 全球地震散点图</a:t>
-            </a:r>
-          </a:p>
-          <a:p>
-            <a:r>
-              <a:rPr lang="zh-CN" dirty="0"/>
-              <a:t/>
-            </a:r>
-          </a:p>
-          <a:p>
-            <a:r>
-              <a:rPr lang="zh-CN" dirty="0"/>
-              <a:t>节奏：讲 20 分钟 → 学员自己敲 40 分钟（不看答案）→ 对讲评自查 20 分钟 → 写作业 10 分钟。</a:t>
-            </a:r>
-          </a:p>
-        </p:txBody>
-      </p:sp>
-      <p:sp>
-        <p:nvSpPr>
-          <p:cNvPr id="2" name="讲课提示"/>
-          <p:cNvSpPr txBox="1"/>
-          <p:nvPr/>
-        </p:nvSpPr>
-        <p:spPr>
-          <a:xfrm>
-            <a:off x="457200" y="457200"/>
-            <a:ext cx="6858000" cy="4800600"/>
-          </a:xfrm>
-          <a:prstGeom prst="rect">
-            <a:avLst/>
-          </a:prstGeom>
-        </p:spPr>
-        <p:txBody>
-          <a:bodyPr wrap="square"/>
-          <a:lstStyle/>
-          <a:p>
-            <a:r>
-              <a:rPr lang="zh-CN" dirty="0"/>
-              <a:t>第 87 节 · 实战、答案与验收复盘</a:t>
-            </a:r>
-          </a:p>
-          <a:p>
-            <a:r>
-              <a:rPr lang="zh-CN" dirty="0"/>
-              <a:t>单元 16 · 下载真实数据 · W20–W21</a:t>
-            </a:r>
-          </a:p>
-          <a:p>
-            <a:r>
-              <a:rPr lang="zh-CN" dirty="0"/>
-              <a:t/>
-            </a:r>
-          </a:p>
-          <a:p>
-            <a:r>
-              <a:rPr lang="zh-CN" dirty="0"/>
-              <a:t>学习目标：独立完成单元 16 练习，处理真实脏数据</a:t>
-            </a:r>
-          </a:p>
-          <a:p>
-            <a:r>
-              <a:rPr lang="zh-CN" dirty="0"/>
-              <a:t/>
-            </a:r>
-          </a:p>
-          <a:p>
-            <a:r>
-              <a:rPr lang="zh-CN" dirty="0"/>
-              <a:t>课堂实操（40 分钟，不看答案）：</a:t>
-            </a:r>
-          </a:p>
-          <a:p>
-            <a:r>
-              <a:rPr lang="zh-CN" dirty="0"/>
-              <a:t>· 限时 30 分钟独立完成基础档</a:t>
-            </a:r>
-          </a:p>
-          <a:p>
-            <a:r>
-              <a:rPr lang="zh-CN" dirty="0"/>
-              <a:t>· 逐题对照答案讲评</a:t>
-            </a:r>
-          </a:p>
-          <a:p>
-            <a:r>
-              <a:rPr lang="zh-CN" dirty="0"/>
-              <a:t/>
-            </a:r>
-          </a:p>
-          <a:p>
-            <a:r>
-              <a:rPr lang="zh-CN" dirty="0"/>
-              <a:t>课后作业：</a:t>
-            </a:r>
-          </a:p>
-          <a:p>
-            <a:r>
-              <a:rPr lang="zh-CN" dirty="0"/>
-              <a:t>· ★ 产出：气温图 + 全球地震散点图</a:t>
-            </a:r>
-          </a:p>
-          <a:p>
-            <a:r>
-              <a:rPr lang="zh-CN" dirty="0"/>
-              <a:t/>
-            </a:r>
-          </a:p>
-          <a:p>
-            <a:r>
-              <a:rPr lang="zh-CN" dirty="0"/>
-              <a:t>节奏：讲 20 分钟 → 学员自己敲 40 分钟（不看答案）→ 对讲评自查 20 分钟 → 写作业 10 分钟。</a:t>
-            </a:r>
-          </a:p>
-        </p:txBody>
-      </p:sp>
-    </p:spTree>
-  </p:cSld>
-  <p:clrMapOvr>
-    <a:masterClrMapping/>
-  </p:clrMapOvr>
-</p:notes>
-</file>
-
-<file path=ppt/notesSlides/notesSlide9.xml><?xml version="1.0" encoding="utf-8"?>
-<p:notes xmlns:a="http://schemas.openxmlformats.org/drawingml/2006/main" xmlns:p="http://schemas.openxmlformats.org/presentationml/2006/main" xmlns:r="http://schemas.openxmlformats.org/officeDocument/2006/relationships">
-  <p:cSld>
-    <p:spTree>
-      <p:nvGrpSpPr>
-        <p:cNvPr id="1" name=""/>
-        <p:cNvGrpSpPr/>
-        <p:nvPr/>
-      </p:nvGrpSpPr>
-      <p:grpSpPr>
-        <a:xfrm>
-          <a:off x="0" y="0"/>
-          <a:ext cx="0" cy="0"/>
-          <a:chOff x="0" y="0"/>
-          <a:chExt cx="0" cy="0"/>
-        </a:xfrm>
-      </p:grpSpPr>
-      <p:sp>
-        <p:nvSpPr>
-          <p:cNvPr id="2" name="讲课提示"/>
-          <p:cNvSpPr txBox="1"/>
-          <p:nvPr/>
-        </p:nvSpPr>
-        <p:spPr>
-          <a:xfrm>
-            <a:off x="457200" y="457200"/>
-            <a:ext cx="6858000" cy="4800600"/>
-          </a:xfrm>
-          <a:prstGeom prst="rect">
-            <a:avLst/>
-          </a:prstGeom>
-        </p:spPr>
-        <p:txBody>
-          <a:bodyPr wrap="square"/>
-          <a:lstStyle/>
-          <a:p>
-            <a:r>
-              <a:rPr lang="zh-CN" dirty="0"/>
-              <a:t>第 87 节 · 核心知识点：实战、答案与验收复盘</a:t>
-            </a:r>
-          </a:p>
-          <a:p>
-            <a:r>
-              <a:rPr lang="zh-CN" dirty="0"/>
-              <a:t/>
-            </a:r>
-          </a:p>
-          <a:p>
-            <a:r>
-              <a:rPr lang="zh-CN" dirty="0"/>
-              <a:t>讲这一页时：先让学生说出上节课的结论，再逐块讲要点。</a:t>
-            </a:r>
-          </a:p>
-          <a:p>
-            <a:r>
-              <a:rPr lang="zh-CN" dirty="0"/>
-              <a:t>每讲完一块，问一句「这一步如果写错了，报错会长什么样？」——把错误提前讲。</a:t>
-            </a:r>
-          </a:p>
-          <a:p>
-            <a:r>
-              <a:rPr lang="zh-CN" dirty="0"/>
-              <a:t/>
-            </a:r>
-          </a:p>
-          <a:p>
-            <a:r>
-              <a:rPr lang="zh-CN" dirty="0"/>
-              <a:t>本节目标：独立完成单元 16 练习，处理真实脏数据</a:t>
-            </a:r>
-          </a:p>
-          <a:p>
-            <a:r>
-              <a:rPr lang="zh-CN" dirty="0"/>
-              <a:t/>
-            </a:r>
-          </a:p>
-          <a:p>
-            <a:r>
-              <a:rPr lang="zh-CN" dirty="0"/>
-              <a:t>看不到懂的地方，回讲义对应小节读一遍，再回来对着这页复述一次——能讲出来才算真懂。</a:t>
-            </a:r>
-          </a:p>
-        </p:txBody>
-      </p:sp>
-      <p:sp>
-        <p:nvSpPr>
-          <p:cNvPr id="2" name="讲课提示"/>
-          <p:cNvSpPr txBox="1"/>
-          <p:nvPr/>
-        </p:nvSpPr>
-        <p:spPr>
-          <a:xfrm>
-            <a:off x="457200" y="457200"/>
-            <a:ext cx="6858000" cy="4800600"/>
-          </a:xfrm>
-          <a:prstGeom prst="rect">
-            <a:avLst/>
-          </a:prstGeom>
-        </p:spPr>
-        <p:txBody>
-          <a:bodyPr wrap="square"/>
-          <a:lstStyle/>
-          <a:p>
-            <a:r>
-              <a:rPr lang="zh-CN" dirty="0"/>
-              <a:t>第 87 节 · 核心知识点：实战、答案与验收复盘</a:t>
-            </a:r>
-          </a:p>
-          <a:p>
-            <a:r>
-              <a:rPr lang="zh-CN" dirty="0"/>
-              <a:t/>
-            </a:r>
-          </a:p>
-          <a:p>
-            <a:r>
-              <a:rPr lang="zh-CN" dirty="0"/>
-              <a:t>讲这一页时：先让学生说出上节课的结论，再逐块讲要点。</a:t>
-            </a:r>
-          </a:p>
-          <a:p>
-            <a:r>
-              <a:rPr lang="zh-CN" dirty="0"/>
-              <a:t>每讲完一块，问一句「这一步如果写错了，报错会长什么样？」——把错误提前讲。</a:t>
-            </a:r>
-          </a:p>
-          <a:p>
-            <a:r>
-              <a:rPr lang="zh-CN" dirty="0"/>
-              <a:t/>
-            </a:r>
-          </a:p>
-          <a:p>
-            <a:r>
-              <a:rPr lang="zh-CN" dirty="0"/>
-              <a:t>本节目标：独立完成单元 16 练习，处理真实脏数据</a:t>
-            </a:r>
-          </a:p>
-          <a:p>
-            <a:r>
-              <a:rPr lang="zh-CN" dirty="0"/>
-              <a:t/>
-            </a:r>
-          </a:p>
-          <a:p>
-            <a:r>
-              <a:rPr lang="zh-CN" dirty="0"/>
-              <a:t>看不到懂的地方，回讲义对应小节读一遍，再回来对着这页复述一次——能讲出来才算真懂。</a:t>
-            </a:r>
-          </a:p>
-        </p:txBody>
-      </p:sp>
-    </p:spTree>
-  </p:cSld>
-  <p:clrMapOvr>
-    <a:masterClrMapping/>
-  </p:clrMapOvr>
-</p:notes>
-</file>
-
 <file path=ppt/slideLayouts/slideLayout1.xml><?xml version="1.0" encoding="utf-8"?>
 <p:sldLayout xmlns:p="http://schemas.openxmlformats.org/presentationml/2006/main" xmlns:a="http://schemas.openxmlformats.org/drawingml/2006/main">
   <p:cSld name="DEFAULT">
@@ -2367,7 +553,7 @@
   <p:cSld>
     <p:spTree>
       <p:nvGrpSpPr>
-        <p:cNvPr id="1" name="" descr="&lt;Slide style={{ width: '1280px', height: '720px', backgroundColor: '#FAFCFE', padding: 0, position: 'relative', overflow: 'hidden' }}&gt;&#13;&#10;    &lt;Box style={{ position: 'absolute', left: 0, top: 0, width: '1280px', height: '150px', background: '#1F5FA8' }} /&gt;&#13;&#10;    &lt;Box style={{ position: 'absolute', left: 64, top: 34, width: '1152px', flexDirection: 'column' }}&gt;&#13;&#10;        &lt;Text style={{ fontSize: 15, fontWeight: 'bold', color: '#BFD9F2', letterSpacing: 2 }}&gt;阶段 2 · 单元 16&lt;/Text&gt;&#13;&#10;        &lt;Text style={{ fontSize: 38, fontWeight: 'bold', color: '#FFFFFF', marginTop: 6 }}&gt;下载真实数据&lt;/Text&gt;&#13;&#10;    &lt;/Box&gt;&#13;&#10;    &lt;Box style={{ position: 'absolute', left: 64, top: 168, width: '1152px', height: 470 }}&gt;&#13;&#10;        &lt;svg width='1152' height='470' viewBox='0 0 1152 470'&gt;&#13;&#10;            &lt;text x='0' y='18' fontSize='15' fontWeight='bold' fill='#16232E' fontFamily='Microsoft YaHei'&gt;本单元共 4 节课&lt;/text&gt;&#13;&#10;            &lt;rect x='0' y='196' width='1152' height='38' rx='7' fill='#FFFFFF' /&gt;&lt;text x='16' y='221' fontSize='15' fontWeight='bold' fill='#1F5FA8' fontFamily='Microsoft YaHei'&gt;第 84 节&lt;/text&gt;&lt;text x='96' y='221' fontSize='15' fill='#16232E' fontFamily='Microsoft YaHei'&gt;CSV 与 datetime&lt;/text&gt;&lt;text x='1080' y='221' fontSize='13' fill='#5A6B7A' textAnchor='end' fontFamily='Microsoft YaHei'&gt;W19–W20&lt;/text&gt;&lt;rect x='0' y='238' width='1152' height='38' rx='7' fill='#F2F7FD' /&gt;&lt;text x='16' y='263' fontSize='15' fontWeight='bold' fill='#1F5FA8' fontFamily='Microsoft YaHei'&gt;第 85 节&lt;/text&gt;&lt;text x='96' y='263' fontSize='15' fill='#16232E' fontFamily='Microsoft YaHei'&gt;缺失值与温度图&lt;/text&gt;&lt;text x='1080' y='263' fontSize='13' fill='#5A6B7A' textAnchor='end' fontFamily='Microsoft YaHei'&gt;W19–W20&lt;/text&gt;&lt;rect x='0' y='280' width='1152' height='38' rx='7' fill='#FFFFFF' /&gt;&lt;text x='16' y='305' fontSize='15' fontWeight='bold' fill='#1F5FA8' fontFamily='Microsoft YaHei'&gt;第 86 节&lt;/text&gt;&lt;text x='96' y='305' fontSize='15' fill='#16232E' fontFamily='Microsoft YaHei'&gt;GeoJSON 与地震散点图&lt;/text&gt;&lt;text x='1080' y='305' fontSize='13' fill='#5A6B7A' textAnchor='end' fontFamily='Microsoft YaHei'&gt;W19–W20&lt;/text&gt;&lt;rect x='0' y='322' width='1152' height='38' rx='7' fill='#F2F7FD' /&gt;&lt;text x='16' y='347' fontSize='15' fontWeight='bold' fill='#1F5FA8' fontFamily='Microsoft YaHei'&gt;第 87 节&lt;/text&gt;&lt;text x='96' y='347' fontSize='15' fill='#16232E' fontFamily='Microsoft YaHei'&gt;实战、答案与验收复盘&lt;/text&gt;&lt;text x='1080' y='347' fontSize='13' fill='#5A6B7A' textAnchor='end' fontFamily='Microsoft YaHei'&gt;W19–W20&lt;/text&gt;&#13;&#10;        &lt;/svg&gt;&#13;&#10;    &lt;/Box&gt;&#13;&#10;    &lt;Box style={{ position: 'absolute', left: 64, bottom: 22, width: '1152px', flexDirection: 'row', justifyContent: 'space-between' }}&gt;&#13;&#10;        &lt;Text style={{ fontSize: 13, color: '#8A9AAA' }}&gt;Python 讲授课件 · 逐节版&lt;/Text&gt;&#13;&#10;        &lt;Text style={{ fontSize: 13, color: '#8A9AAA' }}&gt;单元 16 · 封面&lt;/Text&gt;&#13;&#10;    &lt;/Box&gt;&#13;&#10;&lt;/Slide&gt;&#13;&#10;"/>
+        <p:cNvPr id="1" name="" descr="&lt;Slide style={{ width: '1280px', height: '720px', backgroundColor: '#FAFCFE', padding: 0, position: 'relative', overflow: 'hidden' }}&gt;&#13;&#10;    &lt;Box style={{ position: 'absolute', left: 0, top: 0, width: '1280px', height: '150px', background: '#1F5FA8' }} /&gt;&#13;&#10;    &lt;Box style={{ position: 'absolute', left: 64, top: 34, width: '1152px', flexDirection: 'column' }}&gt;&#13;&#10;        &lt;Text style={{ fontSize: 15, fontWeight: 'bold', color: '#BFD9F2', letterSpacing: 2 }}&gt;阶段 2 · 单元 16&lt;/Text&gt;&#13;&#10;        &lt;Text style={{ fontSize: 38, fontWeight: 'bold', color: '#FFFFFF', marginTop: 6 }}&gt;下载真实数据&lt;/Text&gt;&#13;&#10;    &lt;/Box&gt;&#13;&#10;    &lt;Box style={{ position: 'absolute', left: 64, top: 168, width: '1152px', height: 470 }}&gt;&#13;&#10;        &lt;svg width='1152' height='470' viewBox='0 0 1152 470'&gt;&#13;&#10;            &lt;text x='0' y='18' fontSize='15' fontWeight='bold' fill='#16232E' fontFamily='Microsoft YaHei'&gt;本单元共 4 节课&lt;/text&gt;&#13;&#10;            &lt;rect x='0' y='56.0' width='1152' height='48.0' rx='7' fill='#FFFFFF' /&gt;&lt;text x='16' y='85.0' fontSize='15' fontWeight='bold' fill='#1F5FA8' fontFamily='Microsoft YaHei'&gt;第 84 节&lt;/text&gt;&lt;text x='96' y='85.0' fontSize='15' fill='#16232E' fontFamily='Microsoft YaHei'&gt;CSV 与 datetime&lt;/text&gt;&lt;text x='1080' y='85.0' fontSize='13' fill='#5A6B7A' textAnchor='end' fontFamily='Microsoft YaHei'&gt;W19–W20&lt;/text&gt;&lt;rect x='0' y='155.0' width='1152' height='48.0' rx='7' fill='#F2F7FD' /&gt;&lt;text x='16' y='184.0' fontSize='15' fontWeight='bold' fill='#1F5FA8' fontFamily='Microsoft YaHei'&gt;第 85 节&lt;/text&gt;&lt;text x='96' y='184.0' fontSize='15' fill='#16232E' fontFamily='Microsoft YaHei'&gt;缺失值与温度图&lt;/text&gt;&lt;text x='1080' y='184.0' fontSize='13' fill='#5A6B7A' textAnchor='end' fontFamily='Microsoft YaHei'&gt;W19–W20&lt;/text&gt;&lt;rect x='0' y='254.0' width='1152' height='48.0' rx='7' fill='#FFFFFF' /&gt;&lt;text x='16' y='283.0' fontSize='15' fontWeight='bold' fill='#1F5FA8' fontFamily='Microsoft YaHei'&gt;第 86 节&lt;/text&gt;&lt;text x='96' y='283.0' fontSize='15' fill='#16232E' fontFamily='Microsoft YaHei'&gt;GeoJSON 与地震散点图&lt;/text&gt;&lt;text x='1080' y='283.0' fontSize='13' fill='#5A6B7A' textAnchor='end' fontFamily='Microsoft YaHei'&gt;W19–W20&lt;/text&gt;&lt;rect x='0' y='353.0' width='1152' height='48.0' rx='7' fill='#F2F7FD' /&gt;&lt;text x='16' y='382.0' fontSize='15' fontWeight='bold' fill='#1F5FA8' fontFamily='Microsoft YaHei'&gt;第 87 节&lt;/text&gt;&lt;text x='96' y='382.0' fontSize='15' fill='#16232E' fontFamily='Microsoft YaHei'&gt;实战、答案与验收复盘&lt;/text&gt;&lt;text x='1080' y='382.0' fontSize='13' fill='#5A6B7A' textAnchor='end' fontFamily='Microsoft YaHei'&gt;W19–W20&lt;/text&gt;&#13;&#10;        &lt;/svg&gt;&#13;&#10;    &lt;/Box&gt;&#13;&#10;    &lt;Box style={{ position: 'absolute', left: 64, bottom: 22, width: '1152px', flexDirection: 'row', justifyContent: 'space-between' }}&gt;&#13;&#10;        &lt;Text style={{ fontSize: 13, color: '#8A9AAA' }}&gt;Python 讲授课件 · 逐节版&lt;/Text&gt;&#13;&#10;        &lt;Text style={{ fontSize: 13, color: '#8A9AAA' }}&gt;单元 16 · 封面&lt;/Text&gt;&#13;&#10;    &lt;/Box&gt;&#13;&#10;&lt;/Slide&gt;&#13;&#10;"/>
         <p:cNvGrpSpPr/>
         <p:nvPr/>
       </p:nvGrpSpPr>
@@ -3491,7 +1677,7 @@
   <p:cSld>
     <p:spTree>
       <p:nvGrpSpPr>
-        <p:cNvPr id="29" name="" descr="&lt;Slide style={{ width: '1280px', height: '720px', backgroundColor: '#FAFCFE', padding: 0, position: 'relative', overflow: 'hidden' }}&gt;&#13;&#10;    &lt;Box style={{ position: 'absolute', left: 64, top: 36, width: '1152px', flexDirection: 'row', alignItems: 'center', gap: 12 }}&gt;&#13;&#10;        &lt;Box style={{ background: '#0E9B78', borderRadius: 5, padding: '3px 11px' }}&gt;&#13;&#10;            &lt;Text style={{ fontSize: 14, fontWeight: 'bold', color: '#FFFFFF' }}&gt;第 84 节&lt;/Text&gt;&#13;&#10;        &lt;/Box&gt;&#13;&#10;        &lt;Text style={{ fontSize: 30, fontWeight: 'bold', color: '#16232E' }}&gt;核心知识点&lt;/Text&gt;&#13;&#10;        &lt;Text style={{ fontSize: 15, color: '#5A6B7A', marginTop: 10 }}&gt;· CSV 与 datetime&lt;/Text&gt;&#13;&#10;    &lt;/Box&gt;&#13;&#10;    &lt;Box style={{ position: 'absolute', left: 0, top: 0, width: '1280px', height: '720px' }}&gt;&#13;&#10;        &lt;svg width='1280' height='720' viewBox='0 0 1280 720'&gt;&#13;&#10;            &lt;rect x='64' y='96' width='548' height='330' rx='12' fill='#FFFFFF' stroke='#D8E3EE' /&gt;&lt;rect x='64' y='96' width='548' height='4' rx='2' fill='#1F5FA8' /&gt;&lt;text x='82' y='130' fontSize='15.5' fontWeight='bold' fill='#1F5FA8' textAnchor='start' fontFamily='Microsoft YaHei'&gt;2.1 真实数据长什么样，去哪下载&lt;/text&gt;&lt;text x='82' y='169.0' fontSize='13' fill='#3A4A58' textAnchor='start' fontFamily='Microsoft YaHei'&gt;· 教材数据去哪了。 第 16 章的代码会读这几个文件：&lt;/text&gt;&lt;text x='82' y='197.5' fontSize='13' fill='#3A4A58' textAnchor='start' fontFamily='Microsoft YaHei'&gt;· 数据的真正来源。 气象数据来自美国 NOAA（国家海洋和大气管理局）的观测站网络；&lt;/text&gt;&lt;text x='82' y='217.0' fontSize='13' fill='#3A4A58' textAnchor='start' fontFamily='Microsoft YaHei'&gt;地震数据来自美国地质…&lt;/text&gt;&lt;rect x='668' y='96' width='548' height='330' rx='12' fill='#FFFFFF' stroke='#D8E3EE' /&gt;&lt;rect x='668' y='96' width='548' height='4' rx='2' fill='#1F5FA8' /&gt;&lt;text x='686' y='130' fontSize='15.5' fontWeight='bold' fill='#1F5FA8' textAnchor='start' fontFamily='Microsoft YaHei'&gt;2.2 CSV：三件套读表头&lt;/text&gt;&lt;text x='686' y='169.0' fontSize='13' fill='#3A4A58' textAnchor='start' fontFamily='Microsoft YaHei'&gt;· 为什么先取表头？ 表头告诉你每列是什么，但列的顺序不保证——今天 DATE 在第 2 &lt;/text&gt;&lt;text x='686' y='188.5' fontSize='13' fill='#3A4A58' textAnchor='start' fontFamily='Microsoft YaHei'&gt;列，明年 NOA…&lt;/text&gt;&lt;rect x='64' y='574' width='1152' height='66' rx='12' fill='#EEF5FB' /&gt;&lt;text x='84' y='616' fontSize='14' fill='#243444' textAnchor='start' fontFamily='Microsoft YaHei'&gt;看不懂的地方先回讲义对应小节读一遍，再回来对着这页复述一次——能讲出来才算真懂。&lt;/text&gt;&#13;&#10;            &lt;text x='64' y='684' fontSize='13' fill='#8A9AAA' fontFamily='Microsoft YaHei'&gt;Python 讲授课件 · 逐节版&lt;/text&gt;&#13;&#10;            &lt;text x='1216' y='684' fontSize='13' fill='#8A9AAA' textAnchor='end' fontFamily='Microsoft YaHei'&gt;单元 16 · 第 84 节&lt;/text&gt;&#13;&#10;        &lt;/svg&gt;&#13;&#10;    &lt;/Box&gt;&#13;&#10;&lt;/Slide&gt;&#13;&#10;"/>
+        <p:cNvPr id="29" name="" descr="&lt;Slide style={{ width: '1280px', height: '720px', backgroundColor: '#FAFCFE', padding: 0, position: 'relative', overflow: 'hidden' }}&gt;&#13;&#10;    &lt;Box style={{ position: 'absolute', left: 64, top: 36, width: '1152px', flexDirection: 'row', alignItems: 'center', gap: 12 }}&gt;&#13;&#10;        &lt;Box style={{ background: '#0E9B78', borderRadius: 5, padding: '3px 11px' }}&gt;&#13;&#10;            &lt;Text style={{ fontSize: 14, fontWeight: 'bold', color: '#FFFFFF' }}&gt;第 84 节&lt;/Text&gt;&#13;&#10;        &lt;/Box&gt;&#13;&#10;        &lt;Text style={{ fontSize: 30, fontWeight: 'bold', color: '#16232E' }}&gt;核心知识点&lt;/Text&gt;&#13;&#10;        &lt;Text style={{ fontSize: 15, color: '#5A6B7A', marginTop: 10 }}&gt;· CSV 与 datetime&lt;/Text&gt;&#13;&#10;    &lt;/Box&gt;&#13;&#10;    &lt;Box style={{ position: 'absolute', left: 0, top: 0, width: '1280px', height: '720px' }}&gt;&#13;&#10;        &lt;svg width='1280' height='720' viewBox='0 0 1280 720'&gt;&#13;&#10;            &lt;rect x='64' y='96' width='548' height='330' rx='12' fill='#FFFFFF' stroke='#D8E3EE' /&gt;&lt;rect x='64' y='96' width='548' height='4' rx='2' fill='#1F5FA8' /&gt;&lt;text x='82' y='130' fontSize='15.5' fontWeight='bold' fill='#1F5FA8' textAnchor='start' fontFamily='Microsoft YaHei'&gt;2.1 真实数据长什么样，去哪下载&lt;/text&gt;&lt;text x='82' y='169.0' fontSize='13' fill='#3A4A58' textAnchor='start' fontFamily='Microsoft YaHei'&gt;· 教材数据去哪了。&lt;/text&gt;&lt;text x='82' y='197.5' fontSize='13' fill='#3A4A58' textAnchor='start' fontFamily='Microsoft YaHei'&gt;· 数据的真正来源。&lt;/text&gt;&lt;rect x='668' y='96' width='548' height='330' rx='12' fill='#FFFFFF' stroke='#D8E3EE' /&gt;&lt;rect x='668' y='96' width='548' height='4' rx='2' fill='#1F5FA8' /&gt;&lt;text x='686' y='130' fontSize='15.5' fontWeight='bold' fill='#1F5FA8' textAnchor='start' fontFamily='Microsoft YaHei'&gt;2.2 CSV：三件套读表头&lt;/text&gt;&lt;text x='686' y='169.0' fontSize='13' fill='#3A4A58' textAnchor='start' fontFamily='Microsoft YaHei'&gt;· 为什么先取表头？&lt;/text&gt;&lt;rect x='64' y='574' width='1152' height='66' rx='12' fill='#EEF5FB' /&gt;&lt;text x='84' y='616' fontSize='14' fill='#243444' textAnchor='start' fontFamily='Microsoft YaHei'&gt;看不懂的地方先回讲义对应小节读一遍，再回来对着这页复述一次——能讲出来才算真懂。&lt;/text&gt;&#13;&#10;            &lt;text x='64' y='684' fontSize='13' fill='#8A9AAA' fontFamily='Microsoft YaHei'&gt;Python 讲授课件 · 逐节版&lt;/text&gt;&#13;&#10;            &lt;text x='1216' y='684' fontSize='13' fill='#8A9AAA' textAnchor='end' fontFamily='Microsoft YaHei'&gt;单元 16 · 第 84 节&lt;/text&gt;&#13;&#10;        &lt;/svg&gt;&#13;&#10;    &lt;/Box&gt;&#13;&#10;&lt;/Slide&gt;&#13;&#10;"/>
         <p:cNvGrpSpPr/>
         <p:nvPr/>
       </p:nvGrpSpPr>
@@ -3932,7 +2118,7 @@
   <p:cSld>
     <p:spTree>
       <p:nvGrpSpPr>
-        <p:cNvPr id="42" name="" descr="&lt;Slide style={{ width: '1280px', height: '720px', backgroundColor: '#FAFCFE', padding: 0, position: 'relative', overflow: 'hidden' }}&gt;&#13;&#10;    &lt;Box style={{ position: 'absolute', left: 64, top: 36, width: '1152px', flexDirection: 'row', alignItems: 'center', gap: 12 }}&gt;&#13;&#10;        &lt;Box style={{ background: '#0E9B78', borderRadius: 5, padding: '3px 11px' }}&gt;&#13;&#10;            &lt;Text style={{ fontSize: 14, fontWeight: 'bold', color: '#FFFFFF' }}&gt;第 85 节&lt;/Text&gt;&#13;&#10;        &lt;/Box&gt;&#13;&#10;        &lt;Text style={{ fontSize: 30, fontWeight: 'bold', color: '#16232E' }}&gt;核心知识点&lt;/Text&gt;&#13;&#10;        &lt;Text style={{ fontSize: 15, color: '#5A6B7A', marginTop: 10 }}&gt;· 缺失值与温度图&lt;/Text&gt;&#13;&#10;    &lt;/Box&gt;&#13;&#10;    &lt;Box style={{ position: 'absolute', left: 0, top: 0, width: '1280px', height: '720px' }}&gt;&#13;&#10;        &lt;svg width='1280' height='720' viewBox='0 0 1280 720'&gt;&#13;&#10;            &lt;rect x='64' y='96' width='368' height='330' rx='12' fill='#FFFFFF' stroke='#D8E3EE' /&gt;&lt;rect x='64' y='96' width='368' height='4' rx='2' fill='#1F5FA8' /&gt;&lt;text x='82' y='130' fontSize='15.5' fontWeight='bold' fill='#1F5FA8' textAnchor='start' fontFamily='Microsoft YaHei'&gt;2.3 datetime：把字符串变成日期 ★&lt;/text&gt;&lt;text x='82' y='169.0' fontSize='13' fill='#3A4A58' textAnchor='start' fontFamily='Microsoft YaHei'&gt;· 记忆口诀：p 是 parse（解析），字符串 → 日期对象&lt;/text&gt;&lt;text x='82' y='188.5' fontSize='13' fill='#3A4A58' textAnchor='start' fontFamily='Microsoft YaHei'&gt;；反过来 f 是 format（格式），日期…&lt;/text&gt;&lt;rect x='468' y='96' width='368' height='330' rx='12' fill='#FFFFFF' stroke='#D8E3EE' /&gt;&lt;rect x='468' y='96' width='368' height='4' rx='2' fill='#1F5FA8' /&gt;&lt;text x='486' y='130' fontSize='15.5' fontWeight='bold' fill='#1F5FA8' textAnchor='start' fontFamily='Microsoft YaHei'&gt;2.4 缺失值：真实数据的第一课&lt;/text&gt;&lt;text x='486' y='169.0' fontSize='13' fill='#3A4A58' textAnchor='start' fontFamily='Microsoft YaHei'&gt;· 死亡谷的数据里有几天没测最高温，CSV 里对应字段是&lt;/text&gt;&lt;text x='486' y='188.5' fontSize='13' fill='#3A4A58' textAnchor='start' fontFamily='Microsoft YaHei'&gt;空的。int(&quot;&quot;) 会抛 ValueError…&lt;/text&gt;&lt;rect x='872' y='96' width='368' height='330' rx='12' fill='#FFFFFF' stroke='#D8E3EE' /&gt;&lt;rect x='872' y='96' width='368' height='4' rx='2' fill='#1F5FA8' /&gt;&lt;text x='890' y='130' fontSize='15.5' fontWeight='bold' fill='#1F5FA8' textAnchor='start' fontFamily='Microsoft YaHei'&gt;2.5 画温度图：plot + fill_between&lt;/text&gt;&lt;text x='890' y='169.0' fontSize='13' fill='#3A4A58' textAnchor='start' fontFamily='Microsoft YaHei'&gt;· alpha 是透明度（0 全透明 ~ 1 全不透明）。两条线&lt;/text&gt;&lt;text x='890' y='188.5' fontSize='13' fill='#3A4A58' textAnchor='start' fontFamily='Microsoft YaHei'&gt;都半透明，重叠处颜色更深，信息不互相遮挡。&lt;/text&gt;&lt;text x='890' y='217.0' fontSize='13' fill='#3A4A58' textAnchor='start' fontFamily='Microsoft YaHei'&gt;· fill_between 把两条线之间的区域涂上颜色——温度&lt;/text&gt;&lt;text x='890' y='236.5' fontSize='13' fill='#3A4A58' textAnchor='start' fontFamily='Microsoft YaHei'&gt;区间带。一眼看出「这天的温差大不大」，比两…&lt;/text&gt;&lt;text x='890' y='265.0' fontSize='13' fill='#3A4A58' textAnchor='start' fontFamily='Microsoft YaHei'&gt;· fig.autofmt_xdate() 让日期标签斜着排，365 天也&lt;/text&gt;&lt;text x='890' y='284.5' fontSize='13' fill='#3A4A58' textAnchor='start' fontFamily='Microsoft YaHei'&gt;不糊成一团。&lt;/text&gt;&lt;rect x='64' y='574' width='1152' height='66' rx='12' fill='#EEF5FB' /&gt;&lt;text x='84' y='616' fontSize='14' fill='#243444' textAnchor='start' fontFamily='Microsoft YaHei'&gt;看不懂的地方先回讲义对应小节读一遍，再回来对着这页复述一次——能讲出来才算真懂。&lt;/text&gt;&#13;&#10;            &lt;text x='64' y='684' fontSize='13' fill='#8A9AAA' fontFamily='Microsoft YaHei'&gt;Python 讲授课件 · 逐节版&lt;/text&gt;&#13;&#10;            &lt;text x='1216' y='684' fontSize='13' fill='#8A9AAA' textAnchor='end' fontFamily='Microsoft YaHei'&gt;单元 16 · 第 85 节&lt;/text&gt;&#13;&#10;        &lt;/svg&gt;&#13;&#10;    &lt;/Box&gt;&#13;&#10;&lt;/Slide&gt;&#13;&#10;"/>
+        <p:cNvPr id="42" name="" descr="&lt;Slide style={{ width: '1280px', height: '720px', backgroundColor: '#FAFCFE', padding: 0, position: 'relative', overflow: 'hidden' }}&gt;&#13;&#10;    &lt;Box style={{ position: 'absolute', left: 64, top: 36, width: '1152px', flexDirection: 'row', alignItems: 'center', gap: 12 }}&gt;&#13;&#10;        &lt;Box style={{ background: '#0E9B78', borderRadius: 5, padding: '3px 11px' }}&gt;&#13;&#10;            &lt;Text style={{ fontSize: 14, fontWeight: 'bold', color: '#FFFFFF' }}&gt;第 85 节&lt;/Text&gt;&#13;&#10;        &lt;/Box&gt;&#13;&#10;        &lt;Text style={{ fontSize: 30, fontWeight: 'bold', color: '#16232E' }}&gt;核心知识点&lt;/Text&gt;&#13;&#10;        &lt;Text style={{ fontSize: 15, color: '#5A6B7A', marginTop: 10 }}&gt;· 缺失值与温度图&lt;/Text&gt;&#13;&#10;    &lt;/Box&gt;&#13;&#10;    &lt;Box style={{ position: 'absolute', left: 0, top: 0, width: '1280px', height: '720px' }}&gt;&#13;&#10;        &lt;svg width='1280' height='720' viewBox='0 0 1280 720'&gt;&#13;&#10;            &lt;rect x='64' y='96' width='368' height='330' rx='12' fill='#FFFFFF' stroke='#D8E3EE' /&gt;&lt;rect x='64' y='96' width='368' height='4' rx='2' fill='#1F5FA8' /&gt;&lt;text x='82' y='130' fontSize='15.5' fontWeight='bold' fill='#1F5FA8' textAnchor='start' fontFamily='Microsoft YaHei'&gt;2.3 datetime：把字符串变成日期 ★&lt;/text&gt;&lt;text x='82' y='169.0' fontSize='13' fill='#3A4A58' textAnchor='start' fontFamily='Microsoft YaHei'&gt;· 记忆口诀&lt;/text&gt;&lt;rect x='468' y='96' width='368' height='330' rx='12' fill='#FFFFFF' stroke='#D8E3EE' /&gt;&lt;rect x='468' y='96' width='368' height='4' rx='2' fill='#1F5FA8' /&gt;&lt;text x='486' y='130' fontSize='15.5' fontWeight='bold' fill='#1F5FA8' textAnchor='start' fontFamily='Microsoft YaHei'&gt;2.4 缺失值：真实数据的第一课&lt;/text&gt;&lt;text x='486' y='169.0' fontSize='13' fill='#3A4A58' textAnchor='start' fontFamily='Microsoft YaHei'&gt;· 1. try 只包住可能出错的两行转换——strptime&lt;/text&gt;&lt;text x='486' y='188.5' fontSize='13' fill='#3A4A58' textAnchor='start' fontFamily='Microsoft YaHei'&gt;放在外面，日期格式是稳定的…&lt;/text&gt;&lt;text x='486' y='217.0' fontSize='13' fill='#3A4A58' textAnchor='start' fontFamily='Microsoft YaHei'&gt;· 2. else 是灵魂：转换成功才把三个值分别 append。&lt;/text&gt;&lt;text x='486' y='245.5' fontSize='13' fill='#3A4A58' textAnchor='start' fontFamily='Microsoft YaHei'&gt;· 3. 警告要打印出来：print(f&quot;Missing data for&lt;/text&gt;&lt;text x='486' y='265.0' fontSize='13' fill='#3A4A58' textAnchor='start' fontFamily='Microsoft YaHei'&gt;｛current_date｝&quot;…&lt;/text&gt;&lt;rect x='872' y='96' width='368' height='330' rx='12' fill='#FFFFFF' stroke='#D8E3EE' /&gt;&lt;rect x='872' y='96' width='368' height='4' rx='2' fill='#1F5FA8' /&gt;&lt;text x='890' y='130' fontSize='15.5' fontWeight='bold' fill='#1F5FA8' textAnchor='start' fontFamily='Microsoft YaHei'&gt;2.5 画温度图：plot + fill_between&lt;/text&gt;&lt;text x='890' y='169.0' fontSize='13' fill='#3A4A58' textAnchor='start' fontFamily='Microsoft YaHei'&gt;· alpha 是透明度（0 全透明 ~ 1 全不透明）。&lt;/text&gt;&lt;text x='890' y='188.5' fontSize='13' fill='#3A4A58' textAnchor='start' fontFamily='Microsoft YaHei'&gt;两条线都半透明，重叠处颜色更深，信息不互相遮挡。&lt;/text&gt;&lt;text x='890' y='217.0' fontSize='13' fill='#3A4A58' textAnchor='start' fontFamily='Microsoft YaHei'&gt;· fill_between 把两条线之间的区域涂上颜色——温度&lt;/text&gt;&lt;text x='890' y='236.5' fontSize='13' fill='#3A4A58' textAnchor='start' fontFamily='Microsoft YaHei'&gt;区间带。一眼看出「这天的温差大不大」…&lt;/text&gt;&lt;text x='890' y='265.0' fontSize='13' fill='#3A4A58' textAnchor='start' fontFamily='Microsoft YaHei'&gt;· fig.autofmt_xdate() 让日期标签斜着排，365&lt;/text&gt;&lt;text x='890' y='284.5' fontSize='13' fill='#3A4A58' textAnchor='start' fontFamily='Microsoft YaHei'&gt;天也不糊成一团。&lt;/text&gt;&lt;rect x='64' y='574' width='1152' height='66' rx='12' fill='#EEF5FB' /&gt;&lt;text x='84' y='616' fontSize='14' fill='#243444' textAnchor='start' fontFamily='Microsoft YaHei'&gt;看不懂的地方先回讲义对应小节读一遍，再回来对着这页复述一次——能讲出来才算真懂。&lt;/text&gt;&#13;&#10;            &lt;text x='64' y='684' fontSize='13' fill='#8A9AAA' fontFamily='Microsoft YaHei'&gt;Python 讲授课件 · 逐节版&lt;/text&gt;&#13;&#10;            &lt;text x='1216' y='684' fontSize='13' fill='#8A9AAA' textAnchor='end' fontFamily='Microsoft YaHei'&gt;单元 16 · 第 85 节&lt;/text&gt;&#13;&#10;        &lt;/svg&gt;&#13;&#10;    &lt;/Box&gt;&#13;&#10;&lt;/Slide&gt;&#13;&#10;"/>
         <p:cNvGrpSpPr/>
         <p:nvPr/>
       </p:nvGrpSpPr>
@@ -4373,7 +2559,7 @@
   <p:cSld>
     <p:spTree>
       <p:nvGrpSpPr>
-        <p:cNvPr id="55" name="" descr="&lt;Slide style={{ width: '1280px', height: '720px', backgroundColor: '#FAFCFE', padding: 0, position: 'relative', overflow: 'hidden' }}&gt;&#13;&#10;    &lt;Box style={{ position: 'absolute', left: 64, top: 36, width: '1152px', flexDirection: 'row', alignItems: 'center', gap: 12 }}&gt;&#13;&#10;        &lt;Box style={{ background: '#0E9B78', borderRadius: 5, padding: '3px 11px' }}&gt;&#13;&#10;            &lt;Text style={{ fontSize: 14, fontWeight: 'bold', color: '#FFFFFF' }}&gt;第 86 节&lt;/Text&gt;&#13;&#10;        &lt;/Box&gt;&#13;&#10;        &lt;Text style={{ fontSize: 30, fontWeight: 'bold', color: '#16232E' }}&gt;核心知识点&lt;/Text&gt;&#13;&#10;        &lt;Text style={{ fontSize: 15, color: '#5A6B7A', marginTop: 10 }}&gt;· GeoJSON 与地震散点图&lt;/Text&gt;&#13;&#10;    &lt;/Box&gt;&#13;&#10;    &lt;Box style={{ position: 'absolute', left: 0, top: 0, width: '1280px', height: '720px' }}&gt;&#13;&#10;        &lt;svg width='1280' height='720' viewBox='0 0 1280 720'&gt;&#13;&#10;            &lt;rect x='64' y='96' width='548' height='330' rx='12' fill='#FFFFFF' stroke='#D8E3EE' /&gt;&lt;rect x='64' y='96' width='548' height='4' rx='2' fill='#1F5FA8' /&gt;&lt;text x='82' y='130' fontSize='15.5' fontWeight='bold' fill='#1F5FA8' textAnchor='start' fontFamily='Microsoft YaHei'&gt;2.6 GeoJSON：带地理位置的 JSON&lt;/text&gt;&lt;text x='82' y='169.0' fontSize='13' fill='#3A4A58' textAnchor='start' fontFamily='Microsoft YaHei'&gt;· ★ 经纬度顺序是中国新手的高频错误，必须单独强调：&lt;/text&gt;&lt;rect x='668' y='96' width='548' height='330' rx='12' fill='#FFFFFF' stroke='#D8E3EE' /&gt;&lt;rect x='668' y='96' width='548' height='4' rx='2' fill='#1F5FA8' /&gt;&lt;text x='686' y='130' fontSize='15.5' fontWeight='bold' fill='#1F5FA8' textAnchor='start' fontFamily='Microsoft YaHei'&gt;2.7 Plotly 画全球地震散点图&lt;/text&gt;&lt;text x='686' y='169.0' fontSize='13' fill='#3A4A58' textAnchor='start' fontFamily='Microsoft YaHei'&gt;· 指定数据的另一种方式。 px.scatter_geo() 是「快捷函数」，一条龙服务；Plotly &lt;/text&gt;&lt;text x='686' y='188.5' fontSize='13' fill='#3A4A58' textAnchor='start' fontFamily='Microsoft YaHei'&gt;也…&lt;/text&gt;&lt;rect x='64' y='574' width='1152' height='66' rx='12' fill='#EEF5FB' /&gt;&lt;text x='84' y='616' fontSize='14' fill='#243444' textAnchor='start' fontFamily='Microsoft YaHei'&gt;看不懂的地方先回讲义对应小节读一遍，再回来对着这页复述一次——能讲出来才算真懂。&lt;/text&gt;&#13;&#10;            &lt;text x='64' y='684' fontSize='13' fill='#8A9AAA' fontFamily='Microsoft YaHei'&gt;Python 讲授课件 · 逐节版&lt;/text&gt;&#13;&#10;            &lt;text x='1216' y='684' fontSize='13' fill='#8A9AAA' textAnchor='end' fontFamily='Microsoft YaHei'&gt;单元 16 · 第 86 节&lt;/text&gt;&#13;&#10;        &lt;/svg&gt;&#13;&#10;    &lt;/Box&gt;&#13;&#10;&lt;/Slide&gt;&#13;&#10;"/>
+        <p:cNvPr id="55" name="" descr="&lt;Slide style={{ width: '1280px', height: '720px', backgroundColor: '#FAFCFE', padding: 0, position: 'relative', overflow: 'hidden' }}&gt;&#13;&#10;    &lt;Box style={{ position: 'absolute', left: 64, top: 36, width: '1152px', flexDirection: 'row', alignItems: 'center', gap: 12 }}&gt;&#13;&#10;        &lt;Box style={{ background: '#0E9B78', borderRadius: 5, padding: '3px 11px' }}&gt;&#13;&#10;            &lt;Text style={{ fontSize: 14, fontWeight: 'bold', color: '#FFFFFF' }}&gt;第 86 节&lt;/Text&gt;&#13;&#10;        &lt;/Box&gt;&#13;&#10;        &lt;Text style={{ fontSize: 30, fontWeight: 'bold', color: '#16232E' }}&gt;核心知识点&lt;/Text&gt;&#13;&#10;        &lt;Text style={{ fontSize: 15, color: '#5A6B7A', marginTop: 10 }}&gt;· GeoJSON 与地震散点图&lt;/Text&gt;&#13;&#10;    &lt;/Box&gt;&#13;&#10;    &lt;Box style={{ position: 'absolute', left: 0, top: 0, width: '1280px', height: '720px' }}&gt;&#13;&#10;        &lt;svg width='1280' height='720' viewBox='0 0 1280 720'&gt;&#13;&#10;            &lt;rect x='64' y='96' width='548' height='330' rx='12' fill='#FFFFFF' stroke='#D8E3EE' /&gt;&lt;rect x='64' y='96' width='548' height='4' rx='2' fill='#1F5FA8' /&gt;&lt;text x='82' y='130' fontSize='15.5' fontWeight='bold' fill='#1F5FA8' textAnchor='start' fontFamily='Microsoft YaHei'&gt;2.6 GeoJSON：带地理位置的 JSON&lt;/text&gt;&lt;text x='82' y='169.0' fontSize='13' fill='#3A4A58' textAnchor='start' fontFamily='Microsoft YaHei'&gt;· ★ 经纬度顺序是中国新手的高频错误，必须单独强调：&lt;/text&gt;&lt;text x='82' y='197.5' fontSize='13' fill='#3A4A58' textAnchor='start' fontFamily='Microsoft YaHei'&gt;· GeoJSON 的 coordinates 是 [经度, 纬度, 深度]——经度在前，纬度在后。&lt;/text&gt;&lt;text x='82' y='226.0' fontSize='13' fill='#3A4A58' textAnchor='start' fontFamily='Microsoft YaHei'&gt;· 不报错，只是静默地错。&lt;/text&gt;&lt;rect x='668' y='96' width='548' height='330' rx='12' fill='#FFFFFF' stroke='#D8E3EE' /&gt;&lt;rect x='668' y='96' width='548' height='4' rx='2' fill='#1F5FA8' /&gt;&lt;text x='686' y='130' fontSize='15.5' fontWeight='bold' fill='#1F5FA8' textAnchor='start' fontFamily='Microsoft YaHei'&gt;2.7 Plotly 画全球地震散点图&lt;/text&gt;&lt;text x='686' y='169.0' fontSize='13' fill='#3A4A58' textAnchor='start' fontFamily='Microsoft YaHei'&gt;· 指定数据的另一种方式。&lt;/text&gt;&lt;rect x='64' y='574' width='1152' height='66' rx='12' fill='#EEF5FB' /&gt;&lt;text x='84' y='616' fontSize='14' fill='#243444' textAnchor='start' fontFamily='Microsoft YaHei'&gt;看不懂的地方先回讲义对应小节读一遍，再回来对着这页复述一次——能讲出来才算真懂。&lt;/text&gt;&#13;&#10;            &lt;text x='64' y='684' fontSize='13' fill='#8A9AAA' fontFamily='Microsoft YaHei'&gt;Python 讲授课件 · 逐节版&lt;/text&gt;&#13;&#10;            &lt;text x='1216' y='684' fontSize='13' fill='#8A9AAA' textAnchor='end' fontFamily='Microsoft YaHei'&gt;单元 16 · 第 86 节&lt;/text&gt;&#13;&#10;        &lt;/svg&gt;&#13;&#10;    &lt;/Box&gt;&#13;&#10;&lt;/Slide&gt;&#13;&#10;"/>
         <p:cNvGrpSpPr/>
         <p:nvPr/>
       </p:nvGrpSpPr>
@@ -4804,7 +2990,7 @@
   <p:cSld>
     <p:spTree>
       <p:nvGrpSpPr>
-        <p:cNvPr id="68" name="" descr="&lt;Slide style={{ width: '1280px', height: '720px', backgroundColor: '#FAFCFE', padding: 0, position: 'relative', overflow: 'hidden' }}&gt;&#13;&#10;    &lt;Box style={{ position: 'absolute', left: 64, top: 36, width: '1152px', flexDirection: 'row', alignItems: 'center', gap: 12 }}&gt;&#13;&#10;        &lt;Box style={{ background: '#0E9B78', borderRadius: 5, padding: '3px 11px' }}&gt;&#13;&#10;            &lt;Text style={{ fontSize: 14, fontWeight: 'bold', color: '#FFFFFF' }}&gt;第 87 节&lt;/Text&gt;&#13;&#10;        &lt;/Box&gt;&#13;&#10;        &lt;Text style={{ fontSize: 30, fontWeight: 'bold', color: '#16232E' }}&gt;核心知识点&lt;/Text&gt;&#13;&#10;        &lt;Text style={{ fontSize: 15, color: '#5A6B7A', marginTop: 10 }}&gt;· 实战、答案与验收复盘&lt;/Text&gt;&#13;&#10;    &lt;/Box&gt;&#13;&#10;    &lt;Box style={{ position: 'absolute', left: 0, top: 0, width: '1280px', height: '720px' }}&gt;&#13;&#10;        &lt;svg width='1280' height='720' viewBox='0 0 1280 720'&gt;&#13;&#10;            &lt;rect x='64' y='96' width='368' height='330' rx='12' fill='#FFFFFF' stroke='#D8E3EE' /&gt;&lt;rect x='64' y='96' width='368' height='4' rx='2' fill='#1F5FA8' /&gt;&lt;text x='82' y='130' fontSize='15.5' fontWeight='bold' fill='#1F5FA8' textAnchor='start' fontFamily='Microsoft YaHei'&gt;基础档&lt;/text&gt;&lt;text x='82' y='169.0' fontSize='13' fill='#3A4A58' textAnchor='start' fontFamily='Microsoft YaHei'&gt;· 练习 16-1【表头定位器】&lt;/text&gt;&lt;text x='82' y='197.5' fontSize='13' fill='#3A4A58' textAnchor='start' fontFamily='Microsoft YaHei'&gt;· 练习 16-2【日期格式转换器】&lt;/text&gt;&lt;text x='82' y='226.0' fontSize='13' fill='#3A4A58' textAnchor='start' fontFamily='Microsoft YaHei'&gt;· 练习 16-3【缺失值统计员】&lt;/text&gt;&lt;rect x='468' y='96' width='368' height='330' rx='12' fill='#FFFFFF' stroke='#D8E3EE' /&gt;&lt;rect x='468' y='96' width='368' height='4' rx='2' fill='#1F5FA8' /&gt;&lt;text x='486' y='130' fontSize='15.5' fontWeight='bold' fill='#1F5FA8' textAnchor='start' fontFamily='Microsoft YaHei'&gt;进阶档&lt;/text&gt;&lt;text x='486' y='169.0' fontSize='13' fill='#3A4A58' textAnchor='start' fontFamily='Microsoft YaHei'&gt;· 练习 16-4【死亡谷全年温度图】&lt;/text&gt;&lt;text x='486' y='197.5' fontSize='13' fill='#3A4A58' textAnchor='start' fontFamily='Microsoft YaHei'&gt;· 练习 16-5【地震数据探索器】&lt;/text&gt;&lt;text x='486' y='226.0' fontSize='13' fill='#3A4A58' textAnchor='start' fontFamily='Microsoft YaHei'&gt;· 练习 16-6【可交互地震地图】&lt;/text&gt;&lt;rect x='872' y='96' width='368' height='330' rx='12' fill='#FFFFFF' stroke='#D8E3EE' /&gt;&lt;rect x='872' y='96' width='368' height='4' rx='2' fill='#1F5FA8' /&gt;&lt;text x='890' y='130' fontSize='15.5' fontWeight='bold' fill='#1F5FA8' textAnchor='start' fontFamily='Microsoft YaHei'&gt;参考答案 16-1&lt;/text&gt;&lt;text x='890' y='169.0' fontSize='13' fill='#3A4A58' textAnchor='start' fontFamily='Microsoft YaHei'&gt;· import csv&lt;/text&gt;&lt;text x='64' y='470' fontSize='14.5' fontWeight='bold' fill='#0E9B78' textAnchor='start' fontFamily='Microsoft YaHei'&gt;本节的代码示例&lt;/text&gt;&lt;text x='64' y='500' fontSize='13' fill='#3A4A58' textAnchor='start' fontFamily='Microsoft YaHei'&gt;· 造一份教材同款 CSV，并打印表头&lt;/text&gt;&lt;text x='468' y='500' fontSize='13' fill='#3A4A58' textAnchor='start' fontFamily='Microsoft YaHei'&gt;· datetime 解析与格式化&lt;/text&gt;&lt;text x='872' y='500' fontSize='13' fill='#3A4A58' textAnchor='start' fontFamily='Microsoft YaHei'&gt;· 提取数据并处理缺失值（死亡谷风格）&lt;/text&gt;&lt;rect x='64' y='574' width='1152' height='66' rx='12' fill='#EEF5FB' /&gt;&lt;text x='84' y='616' fontSize='14' fill='#243444' textAnchor='start' fontFamily='Microsoft YaHei'&gt;看不懂的地方先回讲义对应小节读一遍，再回来对着这页复述一次——能讲出来才算真懂。&lt;/text&gt;&#13;&#10;            &lt;text x='64' y='684' fontSize='13' fill='#8A9AAA' fontFamily='Microsoft YaHei'&gt;Python 讲授课件 · 逐节版&lt;/text&gt;&#13;&#10;            &lt;text x='1216' y='684' fontSize='13' fill='#8A9AAA' textAnchor='end' fontFamily='Microsoft YaHei'&gt;单元 16 · 第 87 节&lt;/text&gt;&#13;&#10;        &lt;/svg&gt;&#13;&#10;    &lt;/Box&gt;&#13;&#10;&lt;/Slide&gt;&#13;&#10;"/>
+        <p:cNvPr id="68" name="" descr="&lt;Slide style={{ width: '1280px', height: '720px', backgroundColor: '#FAFCFE', padding: 0, position: 'relative', overflow: 'hidden' }}&gt;&#13;&#10;    &lt;Box style={{ position: 'absolute', left: 64, top: 36, width: '1152px', flexDirection: 'row', alignItems: 'center', gap: 12 }}&gt;&#13;&#10;        &lt;Box style={{ background: '#0E9B78', borderRadius: 5, padding: '3px 11px' }}&gt;&#13;&#10;            &lt;Text style={{ fontSize: 14, fontWeight: 'bold', color: '#FFFFFF' }}&gt;第 87 节&lt;/Text&gt;&#13;&#10;        &lt;/Box&gt;&#13;&#10;        &lt;Text style={{ fontSize: 30, fontWeight: 'bold', color: '#16232E' }}&gt;核心知识点&lt;/Text&gt;&#13;&#10;        &lt;Text style={{ fontSize: 15, color: '#5A6B7A', marginTop: 10 }}&gt;· 实战、答案与验收复盘&lt;/Text&gt;&#13;&#10;    &lt;/Box&gt;&#13;&#10;    &lt;Box style={{ position: 'absolute', left: 0, top: 0, width: '1280px', height: '720px' }}&gt;&#13;&#10;        &lt;svg width='1280' height='720' viewBox='0 0 1280 720'&gt;&#13;&#10;            &lt;rect x='64' y='96' width='368' height='330' rx='12' fill='#FFFFFF' stroke='#D8E3EE' /&gt;&lt;rect x='64' y='96' width='368' height='4' rx='2' fill='#1F5FA8' /&gt;&lt;text x='82' y='130' fontSize='15.5' fontWeight='bold' fill='#1F5FA8' textAnchor='start' fontFamily='Microsoft YaHei'&gt;基础档&lt;/text&gt;&lt;text x='82' y='169.0' fontSize='13' fill='#3A4A58' textAnchor='start' fontFamily='Microsoft YaHei'&gt;· 练习 16-1【表头定位器】&lt;/text&gt;&lt;text x='82' y='197.5' fontSize='13' fill='#3A4A58' textAnchor='start' fontFamily='Microsoft YaHei'&gt;· 练习 16-2【日期格式转换器】&lt;/text&gt;&lt;text x='82' y='226.0' fontSize='13' fill='#3A4A58' textAnchor='start' fontFamily='Microsoft YaHei'&gt;· 练习 16-3【缺失值统计员】&lt;/text&gt;&lt;rect x='468' y='96' width='368' height='330' rx='12' fill='#FFFFFF' stroke='#D8E3EE' /&gt;&lt;rect x='468' y='96' width='368' height='4' rx='2' fill='#1F5FA8' /&gt;&lt;text x='486' y='130' fontSize='15.5' fontWeight='bold' fill='#1F5FA8' textAnchor='start' fontFamily='Microsoft YaHei'&gt;进阶档&lt;/text&gt;&lt;text x='486' y='169.0' fontSize='13' fill='#3A4A58' textAnchor='start' fontFamily='Microsoft YaHei'&gt;· 练习 16-4【死亡谷全年温度图】&lt;/text&gt;&lt;text x='486' y='197.5' fontSize='13' fill='#3A4A58' textAnchor='start' fontFamily='Microsoft YaHei'&gt;· 练习 16-5【地震数据探索器】&lt;/text&gt;&lt;text x='486' y='226.0' fontSize='13' fill='#3A4A58' textAnchor='start' fontFamily='Microsoft YaHei'&gt;· 练习 16-6【可交互地震地图】&lt;/text&gt;&lt;rect x='872' y='96' width='368' height='330' rx='12' fill='#FFFFFF' stroke='#D8E3EE' /&gt;&lt;rect x='872' y='96' width='368' height='4' rx='2' fill='#1F5FA8' /&gt;&lt;text x='890' y='130' fontSize='15.5' fontWeight='bold' fill='#1F5FA8' textAnchor='start' fontFamily='Microsoft YaHei'&gt;错误 1：★ 把 coordinates[1]&lt;/text&gt;&lt;text x='890' y='153' fontSize='15.5' fontWeight='bold' fill='#1F5FA8' textAnchor='start' fontFamily='Microsoft YaHei'&gt;当成经度（…&lt;/text&gt;&lt;text x='890' y='192.0' fontSize='13' fill='#3A4A58' textAnchor='start' fontFamily='Microsoft YaHei'&gt;· GeoJSON 的坐标是 [经度, 纬度, 深度]。&lt;/text&gt;&lt;text x='64' y='470' fontSize='14.5' fontWeight='bold' fill='#0E9B78' textAnchor='start' fontFamily='Microsoft YaHei'&gt;本节的代码示例&lt;/text&gt;&lt;text x='64' y='500' fontSize='13' fill='#3A4A58' textAnchor='start' fontFamily='Microsoft YaHei'&gt;· 造一份教材同款 CSV，并打印表头&lt;/text&gt;&lt;text x='468' y='500' fontSize='13' fill='#3A4A58' textAnchor='start' fontFamily='Microsoft YaHei'&gt;· datetime 解析与格式化&lt;/text&gt;&lt;text x='872' y='500' fontSize='13' fill='#3A4A58' textAnchor='start' fontFamily='Microsoft YaHei'&gt;· 提取数据并处理缺失值（死亡谷风格）&lt;/text&gt;&lt;rect x='64' y='574' width='1152' height='66' rx='12' fill='#EEF5FB' /&gt;&lt;text x='84' y='616' fontSize='14' fill='#243444' textAnchor='start' fontFamily='Microsoft YaHei'&gt;看不懂的地方先回讲义对应小节读一遍，再回来对着这页复述一次——能讲出来才算真懂。&lt;/text&gt;&#13;&#10;            &lt;text x='64' y='684' fontSize='13' fill='#8A9AAA' fontFamily='Microsoft YaHei'&gt;Python 讲授课件 · 逐节版&lt;/text&gt;&#13;&#10;            &lt;text x='1216' y='684' fontSize='13' fill='#8A9AAA' textAnchor='end' fontFamily='Microsoft YaHei'&gt;单元 16 · 第 87 节&lt;/text&gt;&#13;&#10;        &lt;/svg&gt;&#13;&#10;    &lt;/Box&gt;&#13;&#10;&lt;/Slide&gt;&#13;&#10;"/>
         <p:cNvGrpSpPr/>
         <p:nvPr/>
       </p:nvGrpSpPr>

--- a/python-course-ppt/逐节课件/Python讲授课件-单元16.pptx
+++ b/python-course-ppt/逐节课件/Python讲授课件-单元16.pptx
@@ -234,6 +234,1038 @@
     </a:lvl9pPr>
   </p:notesStyle>
 </p:notesMaster>
+</file>
+
+<file path=ppt/notesSlides/notesSlide1.xml><?xml version="1.0" encoding="utf-8"?>
+<p:notes xmlns:a="http://schemas.openxmlformats.org/drawingml/2006/main" xmlns:p="http://schemas.openxmlformats.org/presentationml/2006/main" xmlns:r="http://schemas.openxmlformats.org/officeDocument/2006/relationships">
+  <p:cSld>
+    <p:spTree>
+      <p:nvGrpSpPr>
+        <p:cNvPr id="1" name=""/>
+        <p:cNvGrpSpPr/>
+        <p:nvPr/>
+      </p:nvGrpSpPr>
+      <p:grpSpPr>
+        <a:xfrm>
+          <a:off x="0" y="0"/>
+          <a:ext cx="0" cy="0"/>
+          <a:chOff x="0" y="0"/>
+          <a:chExt cx="0" cy="0"/>
+        </a:xfrm>
+      </p:grpSpPr>
+      <p:sp>
+        <p:nvSpPr>
+          <p:cNvPr id="2" name="讲课提示"/>
+          <p:cNvSpPr txBox="1"/>
+          <p:nvPr/>
+        </p:nvSpPr>
+        <p:spPr>
+          <a:xfrm>
+            <a:off x="457200" y="457200"/>
+            <a:ext cx="6858000" cy="4800600"/>
+          </a:xfrm>
+          <a:prstGeom prst="rect">
+            <a:avLst/>
+          </a:prstGeom>
+        </p:spPr>
+        <p:txBody>
+          <a:bodyPr wrap="square"/>
+          <a:lstStyle/>
+          <a:p>
+            <a:r>
+              <a:rPr lang="zh-CN" dirty="0"/>
+              <a:t>单元 16 · 单元 16 · 下载真实数据</a:t>
+            </a:r>
+          </a:p>
+          <a:p>
+            <a:r>
+              <a:rPr lang="zh-CN" dirty="0"/>
+              <a:t/>
+            </a:r>
+          </a:p>
+          <a:p>
+            <a:r>
+              <a:rPr lang="zh-CN" dirty="0"/>
+              <a:t>本单元包含以下课节：</a:t>
+            </a:r>
+          </a:p>
+          <a:p>
+            <a:r>
+              <a:rPr lang="zh-CN" dirty="0"/>
+              <a:t>· 第 84 节 CSV 与 datetime</a:t>
+            </a:r>
+          </a:p>
+          <a:p>
+            <a:r>
+              <a:rPr lang="zh-CN" dirty="0"/>
+              <a:t>· 第 85 节 缺失值与温度图</a:t>
+            </a:r>
+          </a:p>
+          <a:p>
+            <a:r>
+              <a:rPr lang="zh-CN" dirty="0"/>
+              <a:t>· 第 86 节 GeoJSON 与地震散点图</a:t>
+            </a:r>
+          </a:p>
+          <a:p>
+            <a:r>
+              <a:rPr lang="zh-CN" dirty="0"/>
+              <a:t>· 第 87 节 实战、答案与验收复盘</a:t>
+            </a:r>
+          </a:p>
+          <a:p>
+            <a:r>
+              <a:rPr lang="zh-CN" dirty="0"/>
+              <a:t/>
+            </a:r>
+          </a:p>
+          <a:p>
+            <a:r>
+              <a:rPr lang="zh-CN" dirty="0"/>
+              <a:t>开场用 3 分钟讲清：这个单元学完能做出什么，最后会被关卡怎么验。</a:t>
+            </a:r>
+          </a:p>
+        </p:txBody>
+      </p:sp>
+    </p:spTree>
+  </p:cSld>
+  <p:clrMapOvr>
+    <a:masterClrMapping/>
+  </p:clrMapOvr>
+</p:notes>
+</file>
+
+<file path=ppt/notesSlides/notesSlide10.xml><?xml version="1.0" encoding="utf-8"?>
+<p:notes xmlns:a="http://schemas.openxmlformats.org/drawingml/2006/main" xmlns:p="http://schemas.openxmlformats.org/presentationml/2006/main" xmlns:r="http://schemas.openxmlformats.org/officeDocument/2006/relationships">
+  <p:cSld>
+    <p:spTree>
+      <p:nvGrpSpPr>
+        <p:cNvPr id="1" name=""/>
+        <p:cNvGrpSpPr/>
+        <p:nvPr/>
+      </p:nvGrpSpPr>
+      <p:grpSpPr>
+        <a:xfrm>
+          <a:off x="0" y="0"/>
+          <a:ext cx="0" cy="0"/>
+          <a:chOff x="0" y="0"/>
+          <a:chExt cx="0" cy="0"/>
+        </a:xfrm>
+      </p:grpSpPr>
+      <p:sp>
+        <p:nvSpPr>
+          <p:cNvPr id="2" name="讲课提示"/>
+          <p:cNvSpPr txBox="1"/>
+          <p:nvPr/>
+        </p:nvSpPr>
+        <p:spPr>
+          <a:xfrm>
+            <a:off x="457200" y="457200"/>
+            <a:ext cx="6858000" cy="4800600"/>
+          </a:xfrm>
+          <a:prstGeom prst="rect">
+            <a:avLst/>
+          </a:prstGeom>
+        </p:spPr>
+        <p:txBody>
+          <a:bodyPr wrap="square"/>
+          <a:lstStyle/>
+          <a:p>
+            <a:r>
+              <a:rPr lang="zh-CN" dirty="0"/>
+              <a:t>单元 16 小结 · 单元 16 · 小结</a:t>
+            </a:r>
+          </a:p>
+          <a:p>
+            <a:r>
+              <a:rPr lang="zh-CN" dirty="0"/>
+              <a:t/>
+            </a:r>
+          </a:p>
+          <a:p>
+            <a:r>
+              <a:rPr lang="zh-CN" dirty="0"/>
+              <a:t>收尾动作：让学生合上讲义，口述本单元三个最重要的结论；说不出来的，回对应课节。</a:t>
+            </a:r>
+          </a:p>
+          <a:p>
+            <a:r>
+              <a:rPr lang="zh-CN" dirty="0"/>
+              <a:t>然后当场勾一遍本单元课节的「已完成」，没打勾的进下一单元前补掉。</a:t>
+            </a:r>
+          </a:p>
+        </p:txBody>
+      </p:sp>
+    </p:spTree>
+  </p:cSld>
+  <p:clrMapOvr>
+    <a:masterClrMapping/>
+  </p:clrMapOvr>
+</p:notes>
+</file>
+
+<file path=ppt/notesSlides/notesSlide2.xml><?xml version="1.0" encoding="utf-8"?>
+<p:notes xmlns:a="http://schemas.openxmlformats.org/drawingml/2006/main" xmlns:p="http://schemas.openxmlformats.org/presentationml/2006/main" xmlns:r="http://schemas.openxmlformats.org/officeDocument/2006/relationships">
+  <p:cSld>
+    <p:spTree>
+      <p:nvGrpSpPr>
+        <p:cNvPr id="1" name=""/>
+        <p:cNvGrpSpPr/>
+        <p:nvPr/>
+      </p:nvGrpSpPr>
+      <p:grpSpPr>
+        <a:xfrm>
+          <a:off x="0" y="0"/>
+          <a:ext cx="0" cy="0"/>
+          <a:chOff x="0" y="0"/>
+          <a:chExt cx="0" cy="0"/>
+        </a:xfrm>
+      </p:grpSpPr>
+      <p:sp>
+        <p:nvSpPr>
+          <p:cNvPr id="2" name="讲课提示"/>
+          <p:cNvSpPr txBox="1"/>
+          <p:nvPr/>
+        </p:nvSpPr>
+        <p:spPr>
+          <a:xfrm>
+            <a:off x="457200" y="457200"/>
+            <a:ext cx="6858000" cy="4800600"/>
+          </a:xfrm>
+          <a:prstGeom prst="rect">
+            <a:avLst/>
+          </a:prstGeom>
+        </p:spPr>
+        <p:txBody>
+          <a:bodyPr wrap="square"/>
+          <a:lstStyle/>
+          <a:p>
+            <a:r>
+              <a:rPr lang="zh-CN" dirty="0"/>
+              <a:t>第 84 节 · CSV 与 datetime</a:t>
+            </a:r>
+          </a:p>
+          <a:p>
+            <a:r>
+              <a:rPr lang="zh-CN" dirty="0"/>
+              <a:t>单元 16 · 下载真实数据 · W19–W20</a:t>
+            </a:r>
+          </a:p>
+          <a:p>
+            <a:r>
+              <a:rPr lang="zh-CN" dirty="0"/>
+              <a:t/>
+            </a:r>
+          </a:p>
+          <a:p>
+            <a:r>
+              <a:rPr lang="zh-CN" dirty="0"/>
+              <a:t>学习目标：会用 csv 模块读表头与数据；会用 strptime 把字符串变日期</a:t>
+            </a:r>
+          </a:p>
+          <a:p>
+            <a:r>
+              <a:rPr lang="zh-CN" dirty="0"/>
+              <a:t/>
+            </a:r>
+          </a:p>
+          <a:p>
+            <a:r>
+              <a:rPr lang="zh-CN" dirty="0"/>
+              <a:t>课堂实操（40 分钟，不看答案）：</a:t>
+            </a:r>
+          </a:p>
+          <a:p>
+            <a:r>
+              <a:rPr lang="zh-CN" dirty="0"/>
+              <a:t>· 打印表头及其位置并解释为什么不能硬编码列号</a:t>
+            </a:r>
+          </a:p>
+          <a:p>
+            <a:r>
+              <a:rPr lang="zh-CN" dirty="0"/>
+              <a:t>· 把日期字符串转成 datetime 对象</a:t>
+            </a:r>
+          </a:p>
+          <a:p>
+            <a:r>
+              <a:rPr lang="zh-CN" dirty="0"/>
+              <a:t/>
+            </a:r>
+          </a:p>
+          <a:p>
+            <a:r>
+              <a:rPr lang="zh-CN" dirty="0"/>
+              <a:t>课后作业：</a:t>
+            </a:r>
+          </a:p>
+          <a:p>
+            <a:r>
+              <a:rPr lang="zh-CN" dirty="0"/>
+              <a:t>· 下载教材配套 CSV 数据并跑通第一个例子</a:t>
+            </a:r>
+          </a:p>
+          <a:p>
+            <a:r>
+              <a:rPr lang="zh-CN" dirty="0"/>
+              <a:t/>
+            </a:r>
+          </a:p>
+          <a:p>
+            <a:r>
+              <a:rPr lang="zh-CN" dirty="0"/>
+              <a:t>节奏：讲 20 分钟 → 学员自己敲 40 分钟（不看答案）→ 对讲评自查 20 分钟 → 写作业 10 分钟。</a:t>
+            </a:r>
+          </a:p>
+        </p:txBody>
+      </p:sp>
+    </p:spTree>
+  </p:cSld>
+  <p:clrMapOvr>
+    <a:masterClrMapping/>
+  </p:clrMapOvr>
+</p:notes>
+</file>
+
+<file path=ppt/notesSlides/notesSlide3.xml><?xml version="1.0" encoding="utf-8"?>
+<p:notes xmlns:a="http://schemas.openxmlformats.org/drawingml/2006/main" xmlns:p="http://schemas.openxmlformats.org/presentationml/2006/main" xmlns:r="http://schemas.openxmlformats.org/officeDocument/2006/relationships">
+  <p:cSld>
+    <p:spTree>
+      <p:nvGrpSpPr>
+        <p:cNvPr id="1" name=""/>
+        <p:cNvGrpSpPr/>
+        <p:nvPr/>
+      </p:nvGrpSpPr>
+      <p:grpSpPr>
+        <a:xfrm>
+          <a:off x="0" y="0"/>
+          <a:ext cx="0" cy="0"/>
+          <a:chOff x="0" y="0"/>
+          <a:chExt cx="0" cy="0"/>
+        </a:xfrm>
+      </p:grpSpPr>
+      <p:sp>
+        <p:nvSpPr>
+          <p:cNvPr id="2" name="讲课提示"/>
+          <p:cNvSpPr txBox="1"/>
+          <p:nvPr/>
+        </p:nvSpPr>
+        <p:spPr>
+          <a:xfrm>
+            <a:off x="457200" y="457200"/>
+            <a:ext cx="6858000" cy="4800600"/>
+          </a:xfrm>
+          <a:prstGeom prst="rect">
+            <a:avLst/>
+          </a:prstGeom>
+        </p:spPr>
+        <p:txBody>
+          <a:bodyPr wrap="square"/>
+          <a:lstStyle/>
+          <a:p>
+            <a:r>
+              <a:rPr lang="zh-CN" dirty="0"/>
+              <a:t>第 84 节 · 核心知识点：CSV 与 datetime</a:t>
+            </a:r>
+          </a:p>
+          <a:p>
+            <a:r>
+              <a:rPr lang="zh-CN" dirty="0"/>
+              <a:t/>
+            </a:r>
+          </a:p>
+          <a:p>
+            <a:r>
+              <a:rPr lang="zh-CN" dirty="0"/>
+              <a:t>讲这一页时：先让学生说出上节课的结论，再逐块讲要点。</a:t>
+            </a:r>
+          </a:p>
+          <a:p>
+            <a:r>
+              <a:rPr lang="zh-CN" dirty="0"/>
+              <a:t>每讲完一块，问一句「这一步如果写错了，报错会长什么样？」——把错误提前讲。</a:t>
+            </a:r>
+          </a:p>
+          <a:p>
+            <a:r>
+              <a:rPr lang="zh-CN" dirty="0"/>
+              <a:t/>
+            </a:r>
+          </a:p>
+          <a:p>
+            <a:r>
+              <a:rPr lang="zh-CN" dirty="0"/>
+              <a:t>本节目标：会用 csv 模块读表头与数据；会用 strptime 把字符串变日期</a:t>
+            </a:r>
+          </a:p>
+          <a:p>
+            <a:r>
+              <a:rPr lang="zh-CN" dirty="0"/>
+              <a:t/>
+            </a:r>
+          </a:p>
+          <a:p>
+            <a:r>
+              <a:rPr lang="zh-CN" dirty="0"/>
+              <a:t>看不到懂的地方，回讲义对应小节读一遍，再回来对着这页复述一次——能讲出来才算真懂。</a:t>
+            </a:r>
+          </a:p>
+        </p:txBody>
+      </p:sp>
+    </p:spTree>
+  </p:cSld>
+  <p:clrMapOvr>
+    <a:masterClrMapping/>
+  </p:clrMapOvr>
+</p:notes>
+</file>
+
+<file path=ppt/notesSlides/notesSlide4.xml><?xml version="1.0" encoding="utf-8"?>
+<p:notes xmlns:a="http://schemas.openxmlformats.org/drawingml/2006/main" xmlns:p="http://schemas.openxmlformats.org/presentationml/2006/main" xmlns:r="http://schemas.openxmlformats.org/officeDocument/2006/relationships">
+  <p:cSld>
+    <p:spTree>
+      <p:nvGrpSpPr>
+        <p:cNvPr id="1" name=""/>
+        <p:cNvGrpSpPr/>
+        <p:nvPr/>
+      </p:nvGrpSpPr>
+      <p:grpSpPr>
+        <a:xfrm>
+          <a:off x="0" y="0"/>
+          <a:ext cx="0" cy="0"/>
+          <a:chOff x="0" y="0"/>
+          <a:chExt cx="0" cy="0"/>
+        </a:xfrm>
+      </p:grpSpPr>
+      <p:sp>
+        <p:nvSpPr>
+          <p:cNvPr id="2" name="讲课提示"/>
+          <p:cNvSpPr txBox="1"/>
+          <p:nvPr/>
+        </p:nvSpPr>
+        <p:spPr>
+          <a:xfrm>
+            <a:off x="457200" y="457200"/>
+            <a:ext cx="6858000" cy="4800600"/>
+          </a:xfrm>
+          <a:prstGeom prst="rect">
+            <a:avLst/>
+          </a:prstGeom>
+        </p:spPr>
+        <p:txBody>
+          <a:bodyPr wrap="square"/>
+          <a:lstStyle/>
+          <a:p>
+            <a:r>
+              <a:rPr lang="zh-CN" dirty="0"/>
+              <a:t>第 85 节 · 缺失值与温度图</a:t>
+            </a:r>
+          </a:p>
+          <a:p>
+            <a:r>
+              <a:rPr lang="zh-CN" dirty="0"/>
+              <a:t>单元 16 · 下载真实数据 · W20</a:t>
+            </a:r>
+          </a:p>
+          <a:p>
+            <a:r>
+              <a:rPr lang="zh-CN" dirty="0"/>
+              <a:t/>
+            </a:r>
+          </a:p>
+          <a:p>
+            <a:r>
+              <a:rPr lang="zh-CN" dirty="0"/>
+              <a:t>学习目标：知道真实数据的三个坑；会用 try/except 处理缺失值</a:t>
+            </a:r>
+          </a:p>
+          <a:p>
+            <a:r>
+              <a:rPr lang="zh-CN" dirty="0"/>
+              <a:t/>
+            </a:r>
+          </a:p>
+          <a:p>
+            <a:r>
+              <a:rPr lang="zh-CN" dirty="0"/>
+              <a:t>课堂实操（40 分钟，不看答案）：</a:t>
+            </a:r>
+          </a:p>
+          <a:p>
+            <a:r>
+              <a:rPr lang="zh-CN" dirty="0"/>
+              <a:t>· 把缺失那行去掉，看图变形</a:t>
+            </a:r>
+          </a:p>
+          <a:p>
+            <a:r>
+              <a:rPr lang="zh-CN" dirty="0"/>
+              <a:t>· 用 fill_between 画出温度区间带</a:t>
+            </a:r>
+          </a:p>
+          <a:p>
+            <a:r>
+              <a:rPr lang="zh-CN" dirty="0"/>
+              <a:t/>
+            </a:r>
+          </a:p>
+          <a:p>
+            <a:r>
+              <a:rPr lang="zh-CN" dirty="0"/>
+              <a:t>课后作业：</a:t>
+            </a:r>
+          </a:p>
+          <a:p>
+            <a:r>
+              <a:rPr lang="zh-CN" dirty="0"/>
+              <a:t>· ★ 完成练习：给自己的城市画一个月气温图</a:t>
+            </a:r>
+          </a:p>
+          <a:p>
+            <a:r>
+              <a:rPr lang="zh-CN" dirty="0"/>
+              <a:t/>
+            </a:r>
+          </a:p>
+          <a:p>
+            <a:r>
+              <a:rPr lang="zh-CN" dirty="0"/>
+              <a:t>节奏：讲 20 分钟 → 学员自己敲 40 分钟（不看答案）→ 对讲评自查 20 分钟 → 写作业 10 分钟。</a:t>
+            </a:r>
+          </a:p>
+        </p:txBody>
+      </p:sp>
+    </p:spTree>
+  </p:cSld>
+  <p:clrMapOvr>
+    <a:masterClrMapping/>
+  </p:clrMapOvr>
+</p:notes>
+</file>
+
+<file path=ppt/notesSlides/notesSlide5.xml><?xml version="1.0" encoding="utf-8"?>
+<p:notes xmlns:a="http://schemas.openxmlformats.org/drawingml/2006/main" xmlns:p="http://schemas.openxmlformats.org/presentationml/2006/main" xmlns:r="http://schemas.openxmlformats.org/officeDocument/2006/relationships">
+  <p:cSld>
+    <p:spTree>
+      <p:nvGrpSpPr>
+        <p:cNvPr id="1" name=""/>
+        <p:cNvGrpSpPr/>
+        <p:nvPr/>
+      </p:nvGrpSpPr>
+      <p:grpSpPr>
+        <a:xfrm>
+          <a:off x="0" y="0"/>
+          <a:ext cx="0" cy="0"/>
+          <a:chOff x="0" y="0"/>
+          <a:chExt cx="0" cy="0"/>
+        </a:xfrm>
+      </p:grpSpPr>
+      <p:sp>
+        <p:nvSpPr>
+          <p:cNvPr id="2" name="讲课提示"/>
+          <p:cNvSpPr txBox="1"/>
+          <p:nvPr/>
+        </p:nvSpPr>
+        <p:spPr>
+          <a:xfrm>
+            <a:off x="457200" y="457200"/>
+            <a:ext cx="6858000" cy="4800600"/>
+          </a:xfrm>
+          <a:prstGeom prst="rect">
+            <a:avLst/>
+          </a:prstGeom>
+        </p:spPr>
+        <p:txBody>
+          <a:bodyPr wrap="square"/>
+          <a:lstStyle/>
+          <a:p>
+            <a:r>
+              <a:rPr lang="zh-CN" dirty="0"/>
+              <a:t>第 85 节 · 核心知识点：缺失值与温度图</a:t>
+            </a:r>
+          </a:p>
+          <a:p>
+            <a:r>
+              <a:rPr lang="zh-CN" dirty="0"/>
+              <a:t/>
+            </a:r>
+          </a:p>
+          <a:p>
+            <a:r>
+              <a:rPr lang="zh-CN" dirty="0"/>
+              <a:t>讲这一页时：先让学生说出上节课的结论，再逐块讲要点。</a:t>
+            </a:r>
+          </a:p>
+          <a:p>
+            <a:r>
+              <a:rPr lang="zh-CN" dirty="0"/>
+              <a:t>每讲完一块，问一句「这一步如果写错了，报错会长什么样？」——把错误提前讲。</a:t>
+            </a:r>
+          </a:p>
+          <a:p>
+            <a:r>
+              <a:rPr lang="zh-CN" dirty="0"/>
+              <a:t/>
+            </a:r>
+          </a:p>
+          <a:p>
+            <a:r>
+              <a:rPr lang="zh-CN" dirty="0"/>
+              <a:t>本节目标：知道真实数据的三个坑；会用 try/except 处理缺失值</a:t>
+            </a:r>
+          </a:p>
+          <a:p>
+            <a:r>
+              <a:rPr lang="zh-CN" dirty="0"/>
+              <a:t/>
+            </a:r>
+          </a:p>
+          <a:p>
+            <a:r>
+              <a:rPr lang="zh-CN" dirty="0"/>
+              <a:t>看不到懂的地方，回讲义对应小节读一遍，再回来对着这页复述一次——能讲出来才算真懂。</a:t>
+            </a:r>
+          </a:p>
+        </p:txBody>
+      </p:sp>
+    </p:spTree>
+  </p:cSld>
+  <p:clrMapOvr>
+    <a:masterClrMapping/>
+  </p:clrMapOvr>
+</p:notes>
+</file>
+
+<file path=ppt/notesSlides/notesSlide6.xml><?xml version="1.0" encoding="utf-8"?>
+<p:notes xmlns:a="http://schemas.openxmlformats.org/drawingml/2006/main" xmlns:p="http://schemas.openxmlformats.org/presentationml/2006/main" xmlns:r="http://schemas.openxmlformats.org/officeDocument/2006/relationships">
+  <p:cSld>
+    <p:spTree>
+      <p:nvGrpSpPr>
+        <p:cNvPr id="1" name=""/>
+        <p:cNvGrpSpPr/>
+        <p:nvPr/>
+      </p:nvGrpSpPr>
+      <p:grpSpPr>
+        <a:xfrm>
+          <a:off x="0" y="0"/>
+          <a:ext cx="0" cy="0"/>
+          <a:chOff x="0" y="0"/>
+          <a:chExt cx="0" cy="0"/>
+        </a:xfrm>
+      </p:grpSpPr>
+      <p:sp>
+        <p:nvSpPr>
+          <p:cNvPr id="2" name="讲课提示"/>
+          <p:cNvSpPr txBox="1"/>
+          <p:nvPr/>
+        </p:nvSpPr>
+        <p:spPr>
+          <a:xfrm>
+            <a:off x="457200" y="457200"/>
+            <a:ext cx="6858000" cy="4800600"/>
+          </a:xfrm>
+          <a:prstGeom prst="rect">
+            <a:avLst/>
+          </a:prstGeom>
+        </p:spPr>
+        <p:txBody>
+          <a:bodyPr wrap="square"/>
+          <a:lstStyle/>
+          <a:p>
+            <a:r>
+              <a:rPr lang="zh-CN" dirty="0"/>
+              <a:t>第 86 节 · GeoJSON 与地震散点图</a:t>
+            </a:r>
+          </a:p>
+          <a:p>
+            <a:r>
+              <a:rPr lang="zh-CN" dirty="0"/>
+              <a:t>单元 16 · 下载真实数据 · W20</a:t>
+            </a:r>
+          </a:p>
+          <a:p>
+            <a:r>
+              <a:rPr lang="zh-CN" dirty="0"/>
+              <a:t/>
+            </a:r>
+          </a:p>
+          <a:p>
+            <a:r>
+              <a:rPr lang="zh-CN" dirty="0"/>
+              <a:t>学习目标：读懂 GeoJSON 结构；用 scatter_geo 画全球散点图</a:t>
+            </a:r>
+          </a:p>
+          <a:p>
+            <a:r>
+              <a:rPr lang="zh-CN" dirty="0"/>
+              <a:t/>
+            </a:r>
+          </a:p>
+          <a:p>
+            <a:r>
+              <a:rPr lang="zh-CN" dirty="0"/>
+              <a:t>课堂实操（40 分钟，不看答案）：</a:t>
+            </a:r>
+          </a:p>
+          <a:p>
+            <a:r>
+              <a:rPr lang="zh-CN" dirty="0"/>
+              <a:t>· 打印第一条地震的 mag 与 coordinates</a:t>
+            </a:r>
+          </a:p>
+          <a:p>
+            <a:r>
+              <a:rPr lang="zh-CN" dirty="0"/>
+              <a:t>· 故意把经纬度顺序写反，看图错在哪</a:t>
+            </a:r>
+          </a:p>
+          <a:p>
+            <a:r>
+              <a:rPr lang="zh-CN" dirty="0"/>
+              <a:t/>
+            </a:r>
+          </a:p>
+          <a:p>
+            <a:r>
+              <a:rPr lang="zh-CN" dirty="0"/>
+              <a:t>课后作业：</a:t>
+            </a:r>
+          </a:p>
+          <a:p>
+            <a:r>
+              <a:rPr lang="zh-CN" dirty="0"/>
+              <a:t>· 去 USGS 下载最新一天数据重画</a:t>
+            </a:r>
+          </a:p>
+          <a:p>
+            <a:r>
+              <a:rPr lang="zh-CN" dirty="0"/>
+              <a:t/>
+            </a:r>
+          </a:p>
+          <a:p>
+            <a:r>
+              <a:rPr lang="zh-CN" dirty="0"/>
+              <a:t>节奏：讲 20 分钟 → 学员自己敲 40 分钟（不看答案）→ 对讲评自查 20 分钟 → 写作业 10 分钟。</a:t>
+            </a:r>
+          </a:p>
+        </p:txBody>
+      </p:sp>
+    </p:spTree>
+  </p:cSld>
+  <p:clrMapOvr>
+    <a:masterClrMapping/>
+  </p:clrMapOvr>
+</p:notes>
+</file>
+
+<file path=ppt/notesSlides/notesSlide7.xml><?xml version="1.0" encoding="utf-8"?>
+<p:notes xmlns:a="http://schemas.openxmlformats.org/drawingml/2006/main" xmlns:p="http://schemas.openxmlformats.org/presentationml/2006/main" xmlns:r="http://schemas.openxmlformats.org/officeDocument/2006/relationships">
+  <p:cSld>
+    <p:spTree>
+      <p:nvGrpSpPr>
+        <p:cNvPr id="1" name=""/>
+        <p:cNvGrpSpPr/>
+        <p:nvPr/>
+      </p:nvGrpSpPr>
+      <p:grpSpPr>
+        <a:xfrm>
+          <a:off x="0" y="0"/>
+          <a:ext cx="0" cy="0"/>
+          <a:chOff x="0" y="0"/>
+          <a:chExt cx="0" cy="0"/>
+        </a:xfrm>
+      </p:grpSpPr>
+      <p:sp>
+        <p:nvSpPr>
+          <p:cNvPr id="2" name="讲课提示"/>
+          <p:cNvSpPr txBox="1"/>
+          <p:nvPr/>
+        </p:nvSpPr>
+        <p:spPr>
+          <a:xfrm>
+            <a:off x="457200" y="457200"/>
+            <a:ext cx="6858000" cy="4800600"/>
+          </a:xfrm>
+          <a:prstGeom prst="rect">
+            <a:avLst/>
+          </a:prstGeom>
+        </p:spPr>
+        <p:txBody>
+          <a:bodyPr wrap="square"/>
+          <a:lstStyle/>
+          <a:p>
+            <a:r>
+              <a:rPr lang="zh-CN" dirty="0"/>
+              <a:t>第 86 节 · 核心知识点：GeoJSON 与地震散点图</a:t>
+            </a:r>
+          </a:p>
+          <a:p>
+            <a:r>
+              <a:rPr lang="zh-CN" dirty="0"/>
+              <a:t/>
+            </a:r>
+          </a:p>
+          <a:p>
+            <a:r>
+              <a:rPr lang="zh-CN" dirty="0"/>
+              <a:t>讲这一页时：先让学生说出上节课的结论，再逐块讲要点。</a:t>
+            </a:r>
+          </a:p>
+          <a:p>
+            <a:r>
+              <a:rPr lang="zh-CN" dirty="0"/>
+              <a:t>每讲完一块，问一句「这一步如果写错了，报错会长什么样？」——把错误提前讲。</a:t>
+            </a:r>
+          </a:p>
+          <a:p>
+            <a:r>
+              <a:rPr lang="zh-CN" dirty="0"/>
+              <a:t/>
+            </a:r>
+          </a:p>
+          <a:p>
+            <a:r>
+              <a:rPr lang="zh-CN" dirty="0"/>
+              <a:t>本节目标：读懂 GeoJSON 结构；用 scatter_geo 画全球散点图</a:t>
+            </a:r>
+          </a:p>
+          <a:p>
+            <a:r>
+              <a:rPr lang="zh-CN" dirty="0"/>
+              <a:t/>
+            </a:r>
+          </a:p>
+          <a:p>
+            <a:r>
+              <a:rPr lang="zh-CN" dirty="0"/>
+              <a:t>看不到懂的地方，回讲义对应小节读一遍，再回来对着这页复述一次——能讲出来才算真懂。</a:t>
+            </a:r>
+          </a:p>
+        </p:txBody>
+      </p:sp>
+    </p:spTree>
+  </p:cSld>
+  <p:clrMapOvr>
+    <a:masterClrMapping/>
+  </p:clrMapOvr>
+</p:notes>
+</file>
+
+<file path=ppt/notesSlides/notesSlide8.xml><?xml version="1.0" encoding="utf-8"?>
+<p:notes xmlns:a="http://schemas.openxmlformats.org/drawingml/2006/main" xmlns:p="http://schemas.openxmlformats.org/presentationml/2006/main" xmlns:r="http://schemas.openxmlformats.org/officeDocument/2006/relationships">
+  <p:cSld>
+    <p:spTree>
+      <p:nvGrpSpPr>
+        <p:cNvPr id="1" name=""/>
+        <p:cNvGrpSpPr/>
+        <p:nvPr/>
+      </p:nvGrpSpPr>
+      <p:grpSpPr>
+        <a:xfrm>
+          <a:off x="0" y="0"/>
+          <a:ext cx="0" cy="0"/>
+          <a:chOff x="0" y="0"/>
+          <a:chExt cx="0" cy="0"/>
+        </a:xfrm>
+      </p:grpSpPr>
+      <p:sp>
+        <p:nvSpPr>
+          <p:cNvPr id="2" name="讲课提示"/>
+          <p:cNvSpPr txBox="1"/>
+          <p:nvPr/>
+        </p:nvSpPr>
+        <p:spPr>
+          <a:xfrm>
+            <a:off x="457200" y="457200"/>
+            <a:ext cx="6858000" cy="4800600"/>
+          </a:xfrm>
+          <a:prstGeom prst="rect">
+            <a:avLst/>
+          </a:prstGeom>
+        </p:spPr>
+        <p:txBody>
+          <a:bodyPr wrap="square"/>
+          <a:lstStyle/>
+          <a:p>
+            <a:r>
+              <a:rPr lang="zh-CN" dirty="0"/>
+              <a:t>第 87 节 · 实战、答案与验收复盘</a:t>
+            </a:r>
+          </a:p>
+          <a:p>
+            <a:r>
+              <a:rPr lang="zh-CN" dirty="0"/>
+              <a:t>单元 16 · 下载真实数据 · W20–W21</a:t>
+            </a:r>
+          </a:p>
+          <a:p>
+            <a:r>
+              <a:rPr lang="zh-CN" dirty="0"/>
+              <a:t/>
+            </a:r>
+          </a:p>
+          <a:p>
+            <a:r>
+              <a:rPr lang="zh-CN" dirty="0"/>
+              <a:t>学习目标：独立完成单元 16 练习，处理真实脏数据</a:t>
+            </a:r>
+          </a:p>
+          <a:p>
+            <a:r>
+              <a:rPr lang="zh-CN" dirty="0"/>
+              <a:t/>
+            </a:r>
+          </a:p>
+          <a:p>
+            <a:r>
+              <a:rPr lang="zh-CN" dirty="0"/>
+              <a:t>课堂实操（40 分钟，不看答案）：</a:t>
+            </a:r>
+          </a:p>
+          <a:p>
+            <a:r>
+              <a:rPr lang="zh-CN" dirty="0"/>
+              <a:t>· 限时 30 分钟独立完成基础档</a:t>
+            </a:r>
+          </a:p>
+          <a:p>
+            <a:r>
+              <a:rPr lang="zh-CN" dirty="0"/>
+              <a:t>· 逐题对照答案讲评</a:t>
+            </a:r>
+          </a:p>
+          <a:p>
+            <a:r>
+              <a:rPr lang="zh-CN" dirty="0"/>
+              <a:t/>
+            </a:r>
+          </a:p>
+          <a:p>
+            <a:r>
+              <a:rPr lang="zh-CN" dirty="0"/>
+              <a:t>课后作业：</a:t>
+            </a:r>
+          </a:p>
+          <a:p>
+            <a:r>
+              <a:rPr lang="zh-CN" dirty="0"/>
+              <a:t>· ★ 产出：气温图 + 全球地震散点图</a:t>
+            </a:r>
+          </a:p>
+          <a:p>
+            <a:r>
+              <a:rPr lang="zh-CN" dirty="0"/>
+              <a:t/>
+            </a:r>
+          </a:p>
+          <a:p>
+            <a:r>
+              <a:rPr lang="zh-CN" dirty="0"/>
+              <a:t>节奏：讲 20 分钟 → 学员自己敲 40 分钟（不看答案）→ 对讲评自查 20 分钟 → 写作业 10 分钟。</a:t>
+            </a:r>
+          </a:p>
+        </p:txBody>
+      </p:sp>
+    </p:spTree>
+  </p:cSld>
+  <p:clrMapOvr>
+    <a:masterClrMapping/>
+  </p:clrMapOvr>
+</p:notes>
+</file>
+
+<file path=ppt/notesSlides/notesSlide9.xml><?xml version="1.0" encoding="utf-8"?>
+<p:notes xmlns:a="http://schemas.openxmlformats.org/drawingml/2006/main" xmlns:p="http://schemas.openxmlformats.org/presentationml/2006/main" xmlns:r="http://schemas.openxmlformats.org/officeDocument/2006/relationships">
+  <p:cSld>
+    <p:spTree>
+      <p:nvGrpSpPr>
+        <p:cNvPr id="1" name=""/>
+        <p:cNvGrpSpPr/>
+        <p:nvPr/>
+      </p:nvGrpSpPr>
+      <p:grpSpPr>
+        <a:xfrm>
+          <a:off x="0" y="0"/>
+          <a:ext cx="0" cy="0"/>
+          <a:chOff x="0" y="0"/>
+          <a:chExt cx="0" cy="0"/>
+        </a:xfrm>
+      </p:grpSpPr>
+      <p:sp>
+        <p:nvSpPr>
+          <p:cNvPr id="2" name="讲课提示"/>
+          <p:cNvSpPr txBox="1"/>
+          <p:nvPr/>
+        </p:nvSpPr>
+        <p:spPr>
+          <a:xfrm>
+            <a:off x="457200" y="457200"/>
+            <a:ext cx="6858000" cy="4800600"/>
+          </a:xfrm>
+          <a:prstGeom prst="rect">
+            <a:avLst/>
+          </a:prstGeom>
+        </p:spPr>
+        <p:txBody>
+          <a:bodyPr wrap="square"/>
+          <a:lstStyle/>
+          <a:p>
+            <a:r>
+              <a:rPr lang="zh-CN" dirty="0"/>
+              <a:t>第 87 节 · 核心知识点：实战、答案与验收复盘</a:t>
+            </a:r>
+          </a:p>
+          <a:p>
+            <a:r>
+              <a:rPr lang="zh-CN" dirty="0"/>
+              <a:t/>
+            </a:r>
+          </a:p>
+          <a:p>
+            <a:r>
+              <a:rPr lang="zh-CN" dirty="0"/>
+              <a:t>讲这一页时：先让学生说出上节课的结论，再逐块讲要点。</a:t>
+            </a:r>
+          </a:p>
+          <a:p>
+            <a:r>
+              <a:rPr lang="zh-CN" dirty="0"/>
+              <a:t>每讲完一块，问一句「这一步如果写错了，报错会长什么样？」——把错误提前讲。</a:t>
+            </a:r>
+          </a:p>
+          <a:p>
+            <a:r>
+              <a:rPr lang="zh-CN" dirty="0"/>
+              <a:t/>
+            </a:r>
+          </a:p>
+          <a:p>
+            <a:r>
+              <a:rPr lang="zh-CN" dirty="0"/>
+              <a:t>本节目标：独立完成单元 16 练习，处理真实脏数据</a:t>
+            </a:r>
+          </a:p>
+          <a:p>
+            <a:r>
+              <a:rPr lang="zh-CN" dirty="0"/>
+              <a:t/>
+            </a:r>
+          </a:p>
+          <a:p>
+            <a:r>
+              <a:rPr lang="zh-CN" dirty="0"/>
+              <a:t>看不到懂的地方，回讲义对应小节读一遍，再回来对着这页复述一次——能讲出来才算真懂。</a:t>
+            </a:r>
+          </a:p>
+        </p:txBody>
+      </p:sp>
+    </p:spTree>
+  </p:cSld>
+  <p:clrMapOvr>
+    <a:masterClrMapping/>
+  </p:clrMapOvr>
+</p:notes>
 </file>
 
 <file path=ppt/slideLayouts/slideLayout1.xml><?xml version="1.0" encoding="utf-8"?>
